--- a/PitchDeck.pptx
+++ b/PitchDeck.pptx
@@ -4,6 +4,9 @@
   <p:sldMasterIdLst>
     <p:sldMasterId id="2147483648" r:id="rId1"/>
   </p:sldMasterIdLst>
+  <p:notesMasterIdLst>
+    <p:notesMasterId r:id="rId13"/>
+  </p:notesMasterIdLst>
   <p:sldIdLst>
     <p:sldId id="256" r:id="rId2"/>
     <p:sldId id="257" r:id="rId3"/>
@@ -17,10 +20,7 @@
     <p:sldId id="265" r:id="rId11"/>
     <p:sldId id="266" r:id="rId12"/>
   </p:sldIdLst>
-  <p:notesMasterIdLst>
-    <p:notesMasterId r:id="rId13"/>
-  </p:notesMasterIdLst>
-  <p:sldSz cx="9144000" cy="5143500"/>
+  <p:sldSz cx="9144000" cy="5143500" type="screen16x9"/>
   <p:notesSz cx="5143500" cy="9144000"/>
   <p:defaultTextStyle>
     <a:lvl1pPr marL="0" algn="l" defTabSz="914400" rtl="0" eaLnBrk="1" latinLnBrk="0" hangingPunct="1">
@@ -114,13 +114,72 @@
       </a:defRPr>
     </a:lvl9pPr>
   </p:defaultTextStyle>
+  <p:extLst>
+    <p:ext uri="{EFAFB233-063F-42B5-8137-9DF3F51BA10A}">
+      <p15:sldGuideLst xmlns:p15="http://schemas.microsoft.com/office/powerpoint/2012/main"/>
+    </p:ext>
+  </p:extLst>
 </p:presentation>
 </file>
 
+<file path=ppt/revisionInfo.xml><?xml version="1.0" encoding="utf-8"?>
+<p1510:revInfo xmlns:a="http://schemas.openxmlformats.org/drawingml/2006/main" xmlns:r="http://schemas.openxmlformats.org/officeDocument/2006/relationships" xmlns:p1510="http://schemas.microsoft.com/office/powerpoint/2015/10/main">
+  <p1510:revLst>
+    <p1510:client id="{6F7471B1-BC5A-4401-BD28-D0E62F2A589C}" v="6" dt="2026-04-02T01:33:02.451"/>
+  </p1510:revLst>
+</p1510:revInfo>
+</file>
+
+<file path=ppt/changesInfos/changesInfo1.xml><?xml version="1.0" encoding="utf-8"?>
+<pc:chgInfo xmlns:a="http://schemas.openxmlformats.org/drawingml/2006/main" xmlns:r="http://schemas.openxmlformats.org/officeDocument/2006/relationships" xmlns:ac="http://schemas.microsoft.com/office/drawing/2013/main/command" xmlns:pc="http://schemas.microsoft.com/office/powerpoint/2013/main/command">
+  <pc:docChgLst>
+    <pc:chgData name="Robert McCarthy" userId="60571c1a712aae69" providerId="Windows Live" clId="Web-{6F7471B1-BC5A-4401-BD28-D0E62F2A589C}"/>
+    <pc:docChg chg="modSld">
+      <pc:chgData name="Robert McCarthy" userId="60571c1a712aae69" providerId="Windows Live" clId="Web-{6F7471B1-BC5A-4401-BD28-D0E62F2A589C}" dt="2026-04-02T01:33:02.451" v="5" actId="20577"/>
+      <pc:docMkLst>
+        <pc:docMk/>
+      </pc:docMkLst>
+      <pc:sldChg chg="modSp">
+        <pc:chgData name="Robert McCarthy" userId="60571c1a712aae69" providerId="Windows Live" clId="Web-{6F7471B1-BC5A-4401-BD28-D0E62F2A589C}" dt="2026-04-02T01:28:01.341" v="0" actId="20577"/>
+        <pc:sldMkLst>
+          <pc:docMk/>
+          <pc:sldMk cId="0" sldId="258"/>
+        </pc:sldMkLst>
+        <pc:spChg chg="mod">
+          <ac:chgData name="Robert McCarthy" userId="60571c1a712aae69" providerId="Windows Live" clId="Web-{6F7471B1-BC5A-4401-BD28-D0E62F2A589C}" dt="2026-04-02T01:28:01.341" v="0" actId="20577"/>
+          <ac:spMkLst>
+            <pc:docMk/>
+            <pc:sldMk cId="0" sldId="258"/>
+            <ac:spMk id="8" creationId="{00000000-0000-0000-0000-000000000000}"/>
+          </ac:spMkLst>
+        </pc:spChg>
+      </pc:sldChg>
+      <pc:sldChg chg="modSp">
+        <pc:chgData name="Robert McCarthy" userId="60571c1a712aae69" providerId="Windows Live" clId="Web-{6F7471B1-BC5A-4401-BD28-D0E62F2A589C}" dt="2026-04-02T01:33:02.451" v="5" actId="20577"/>
+        <pc:sldMkLst>
+          <pc:docMk/>
+          <pc:sldMk cId="0" sldId="266"/>
+        </pc:sldMkLst>
+        <pc:spChg chg="mod">
+          <ac:chgData name="Robert McCarthy" userId="60571c1a712aae69" providerId="Windows Live" clId="Web-{6F7471B1-BC5A-4401-BD28-D0E62F2A589C}" dt="2026-04-02T01:33:02.451" v="5" actId="20577"/>
+          <ac:spMkLst>
+            <pc:docMk/>
+            <pc:sldMk cId="0" sldId="266"/>
+            <ac:spMk id="11" creationId="{00000000-0000-0000-0000-000000000000}"/>
+          </ac:spMkLst>
+        </pc:spChg>
+      </pc:sldChg>
+    </pc:docChg>
+  </pc:docChgLst>
+</pc:chgInfo>
+</file>
+
 <file path=ppt/charts/chart1.xml><?xml version="1.0" encoding="utf-8"?>
-<c:chartSpace xmlns:c="http://schemas.openxmlformats.org/drawingml/2006/chart" xmlns:a="http://schemas.openxmlformats.org/drawingml/2006/main" xmlns:r="http://schemas.openxmlformats.org/officeDocument/2006/relationships">
+<c:chartSpace xmlns:c="http://schemas.openxmlformats.org/drawingml/2006/chart" xmlns:a="http://schemas.openxmlformats.org/drawingml/2006/main" xmlns:r="http://schemas.openxmlformats.org/officeDocument/2006/relationships" xmlns:c16r2="http://schemas.microsoft.com/office/drawing/2015/06/chart">
   <c:date1904 val="0"/>
+  <c:lang val="en-US"/>
   <c:roundedCorners val="1"/>
+  <c:style val="2"/>
   <c:chart>
     <c:title>
       <c:tx>
@@ -137,7 +196,7 @@
               </a:defRPr>
             </a:pPr>
             <a:r>
-              <a:rPr sz="1200" b="0" i="0" u="none" strike="noStrike">
+              <a:rPr lang="en-US" sz="1200" b="0" i="0" u="none" strike="noStrike">
                 <a:solidFill>
                   <a:srgbClr val="2E2E2E"/>
                 </a:solidFill>
@@ -148,7 +207,6 @@
           </a:p>
         </c:rich>
       </c:tx>
-      <c:layout/>
       <c:overlay val="0"/>
     </c:title>
     <c:autoTitleDeleted val="0"/>
@@ -192,6 +250,11 @@
               </a:solidFill>
               <a:effectLst/>
             </c:spPr>
+            <c:extLst>
+              <c:ext xmlns:c16="http://schemas.microsoft.com/office/drawing/2014/chart" uri="{C3380CC4-5D6E-409C-BE32-E72D297353CC}">
+                <c16:uniqueId val="{00000001-13E8-407A-AFAD-6184D2B53957}"/>
+              </c:ext>
+            </c:extLst>
           </c:dPt>
           <c:dPt>
             <c:idx val="1"/>
@@ -202,6 +265,11 @@
               </a:solidFill>
               <a:effectLst/>
             </c:spPr>
+            <c:extLst>
+              <c:ext xmlns:c16="http://schemas.microsoft.com/office/drawing/2014/chart" uri="{C3380CC4-5D6E-409C-BE32-E72D297353CC}">
+                <c16:uniqueId val="{00000003-13E8-407A-AFAD-6184D2B53957}"/>
+              </c:ext>
+            </c:extLst>
           </c:dPt>
           <c:dPt>
             <c:idx val="2"/>
@@ -212,6 +280,11 @@
               </a:solidFill>
               <a:effectLst/>
             </c:spPr>
+            <c:extLst>
+              <c:ext xmlns:c16="http://schemas.microsoft.com/office/drawing/2014/chart" uri="{C3380CC4-5D6E-409C-BE32-E72D297353CC}">
+                <c16:uniqueId val="{00000005-13E8-407A-AFAD-6184D2B53957}"/>
+              </c:ext>
+            </c:extLst>
           </c:dPt>
           <c:dPt>
             <c:idx val="3"/>
@@ -222,6 +295,11 @@
               </a:solidFill>
               <a:effectLst/>
             </c:spPr>
+            <c:extLst>
+              <c:ext xmlns:c16="http://schemas.microsoft.com/office/drawing/2014/chart" uri="{C3380CC4-5D6E-409C-BE32-E72D297353CC}">
+                <c16:uniqueId val="{00000007-13E8-407A-AFAD-6184D2B53957}"/>
+              </c:ext>
+            </c:extLst>
           </c:dPt>
           <c:dLbls>
             <c:dLbl>
@@ -240,6 +318,7 @@
                       <a:latin typeface="Arial"/>
                     </a:defRPr>
                   </a:pPr>
+                  <a:endParaRPr lang="en-US"/>
                 </a:p>
               </c:txPr>
               <c:showLegendKey val="0"/>
@@ -248,6 +327,12 @@
               <c:showSerName val="0"/>
               <c:showPercent val="1"/>
               <c:showBubbleSize val="0"/>
+              <c:extLst>
+                <c:ext xmlns:c15="http://schemas.microsoft.com/office/drawing/2012/chart" uri="{CE6537A1-D6FC-4f65-9D91-7224C49458BB}"/>
+                <c:ext xmlns:c16="http://schemas.microsoft.com/office/drawing/2014/chart" uri="{C3380CC4-5D6E-409C-BE32-E72D297353CC}">
+                  <c16:uniqueId val="{00000001-13E8-407A-AFAD-6184D2B53957}"/>
+                </c:ext>
+              </c:extLst>
             </c:dLbl>
             <c:dLbl>
               <c:idx val="1"/>
@@ -265,6 +350,7 @@
                       <a:latin typeface="Arial"/>
                     </a:defRPr>
                   </a:pPr>
+                  <a:endParaRPr lang="en-US"/>
                 </a:p>
               </c:txPr>
               <c:showLegendKey val="0"/>
@@ -273,6 +359,12 @@
               <c:showSerName val="0"/>
               <c:showPercent val="1"/>
               <c:showBubbleSize val="0"/>
+              <c:extLst>
+                <c:ext xmlns:c15="http://schemas.microsoft.com/office/drawing/2012/chart" uri="{CE6537A1-D6FC-4f65-9D91-7224C49458BB}"/>
+                <c:ext xmlns:c16="http://schemas.microsoft.com/office/drawing/2014/chart" uri="{C3380CC4-5D6E-409C-BE32-E72D297353CC}">
+                  <c16:uniqueId val="{00000003-13E8-407A-AFAD-6184D2B53957}"/>
+                </c:ext>
+              </c:extLst>
             </c:dLbl>
             <c:dLbl>
               <c:idx val="2"/>
@@ -290,6 +382,7 @@
                       <a:latin typeface="Arial"/>
                     </a:defRPr>
                   </a:pPr>
+                  <a:endParaRPr lang="en-US"/>
                 </a:p>
               </c:txPr>
               <c:showLegendKey val="0"/>
@@ -298,6 +391,12 @@
               <c:showSerName val="0"/>
               <c:showPercent val="1"/>
               <c:showBubbleSize val="0"/>
+              <c:extLst>
+                <c:ext xmlns:c15="http://schemas.microsoft.com/office/drawing/2012/chart" uri="{CE6537A1-D6FC-4f65-9D91-7224C49458BB}"/>
+                <c:ext xmlns:c16="http://schemas.microsoft.com/office/drawing/2014/chart" uri="{C3380CC4-5D6E-409C-BE32-E72D297353CC}">
+                  <c16:uniqueId val="{00000005-13E8-407A-AFAD-6184D2B53957}"/>
+                </c:ext>
+              </c:extLst>
             </c:dLbl>
             <c:dLbl>
               <c:idx val="3"/>
@@ -315,6 +414,7 @@
                       <a:latin typeface="Arial"/>
                     </a:defRPr>
                   </a:pPr>
+                  <a:endParaRPr lang="en-US"/>
                 </a:p>
               </c:txPr>
               <c:showLegendKey val="0"/>
@@ -323,8 +423,21 @@
               <c:showSerName val="0"/>
               <c:showPercent val="1"/>
               <c:showBubbleSize val="0"/>
+              <c:extLst>
+                <c:ext xmlns:c15="http://schemas.microsoft.com/office/drawing/2012/chart" uri="{CE6537A1-D6FC-4f65-9D91-7224C49458BB}"/>
+                <c:ext xmlns:c16="http://schemas.microsoft.com/office/drawing/2014/chart" uri="{C3380CC4-5D6E-409C-BE32-E72D297353CC}">
+                  <c16:uniqueId val="{00000007-13E8-407A-AFAD-6184D2B53957}"/>
+                </c:ext>
+              </c:extLst>
             </c:dLbl>
             <c:numFmt formatCode="0%" sourceLinked="0"/>
+            <c:spPr>
+              <a:noFill/>
+              <a:ln>
+                <a:noFill/>
+              </a:ln>
+              <a:effectLst/>
+            </c:spPr>
             <c:txPr>
               <a:bodyPr/>
               <a:lstStyle/>
@@ -337,6 +450,7 @@
                     <a:latin typeface="Arial"/>
                   </a:defRPr>
                 </a:pPr>
+                <a:endParaRPr lang="en-US"/>
               </a:p>
             </c:txPr>
             <c:dLblPos val="ctr"/>
@@ -347,6 +461,9 @@
             <c:showPercent val="1"/>
             <c:showBubbleSize val="0"/>
             <c:showLeaderLines val="0"/>
+            <c:extLst>
+              <c:ext xmlns:c15="http://schemas.microsoft.com/office/drawing/2012/chart" uri="{CE6537A1-D6FC-4f65-9D91-7224C49458BB}"/>
+            </c:extLst>
           </c:dLbls>
           <c:cat>
             <c:strRef>
@@ -372,6 +489,7 @@
             <c:numRef>
               <c:f>Sheet1!$B$2:$B$5</c:f>
               <c:numCache>
+                <c:formatCode>General</c:formatCode>
                 <c:ptCount val="4"/>
                 <c:pt idx="0">
                   <c:v>50</c:v>
@@ -388,7 +506,21 @@
               </c:numCache>
             </c:numRef>
           </c:val>
+          <c:extLst>
+            <c:ext xmlns:c16="http://schemas.microsoft.com/office/drawing/2014/chart" uri="{C3380CC4-5D6E-409C-BE32-E72D297353CC}">
+              <c16:uniqueId val="{00000008-13E8-407A-AFAD-6184D2B53957}"/>
+            </c:ext>
+          </c:extLst>
         </c:ser>
+        <c:dLbls>
+          <c:showLegendKey val="0"/>
+          <c:showVal val="0"/>
+          <c:showCatName val="0"/>
+          <c:showSerName val="0"/>
+          <c:showPercent val="0"/>
+          <c:showBubbleSize val="0"/>
+          <c:showLeaderLines val="0"/>
+        </c:dLbls>
         <c:firstSliceAng val="0"/>
       </c:pieChart>
       <c:spPr>
@@ -405,6 +537,7 @@
     </c:legend>
     <c:plotVisOnly val="1"/>
     <c:dispBlanksAs val="span"/>
+    <c:showDLblsOverMax val="1"/>
   </c:chart>
   <c:spPr>
     <a:solidFill>
@@ -422,9 +555,11 @@
 </file>
 
 <file path=ppt/charts/chart2.xml><?xml version="1.0" encoding="utf-8"?>
-<c:chartSpace xmlns:c="http://schemas.openxmlformats.org/drawingml/2006/chart" xmlns:a="http://schemas.openxmlformats.org/drawingml/2006/main" xmlns:r="http://schemas.openxmlformats.org/officeDocument/2006/relationships">
+<c:chartSpace xmlns:c="http://schemas.openxmlformats.org/drawingml/2006/chart" xmlns:a="http://schemas.openxmlformats.org/drawingml/2006/main" xmlns:r="http://schemas.openxmlformats.org/officeDocument/2006/relationships" xmlns:c16r2="http://schemas.microsoft.com/office/drawing/2015/06/chart">
   <c:date1904 val="0"/>
+  <c:lang val="en-US"/>
   <c:roundedCorners val="1"/>
+  <c:style val="2"/>
   <c:chart>
     <c:title>
       <c:tx>
@@ -441,7 +576,7 @@
               </a:defRPr>
             </a:pPr>
             <a:r>
-              <a:rPr sz="1000" b="0" i="0" u="none" strike="noStrike">
+              <a:rPr lang="en-US" sz="1000" b="0" i="0" u="none" strike="noStrike">
                 <a:solidFill>
                   <a:srgbClr val="D9CEB2"/>
                 </a:solidFill>
@@ -452,7 +587,6 @@
           </a:p>
         </c:rich>
       </c:tx>
-      <c:layout/>
       <c:overlay val="0"/>
     </c:title>
     <c:autoTitleDeleted val="0"/>
@@ -485,18 +619,26 @@
           <c:invertIfNegative val="0"/>
           <c:dLbls>
             <c:numFmt formatCode="#,##0" sourceLinked="0"/>
+            <c:spPr>
+              <a:noFill/>
+              <a:ln>
+                <a:noFill/>
+              </a:ln>
+              <a:effectLst/>
+            </c:spPr>
             <c:txPr>
               <a:bodyPr/>
               <a:lstStyle/>
               <a:p>
                 <a:pPr>
-                  <a:defRPr b="0" i="0" strike="noStrike" sz="1000" u="none">
+                  <a:defRPr sz="1000" b="0" i="0" u="none" strike="noStrike">
                     <a:solidFill>
                       <a:srgbClr val="FFFFFF"/>
                     </a:solidFill>
                     <a:latin typeface="Arial"/>
                   </a:defRPr>
                 </a:pPr>
+                <a:endParaRPr lang="en-US"/>
               </a:p>
             </c:txPr>
             <c:showLegendKey val="0"/>
@@ -506,37 +648,40 @@
             <c:showPercent val="0"/>
             <c:showBubbleSize val="0"/>
             <c:showLeaderLines val="0"/>
+            <c:extLst>
+              <c:ext xmlns:c15="http://schemas.microsoft.com/office/drawing/2012/chart" uri="{CE6537A1-D6FC-4f65-9D91-7224C49458BB}">
+                <c15:showLeaderLines val="0"/>
+              </c:ext>
+            </c:extLst>
           </c:dLbls>
           <c:cat>
-            <c:multiLvlStrRef>
+            <c:strRef>
               <c:f>Sheet1!$A$2:$A$8</c:f>
-              <c:multiLvlStrCache>
+              <c:strCache>
                 <c:ptCount val="7"/>
-                <c:lvl>
-                  <c:pt idx="0">
-                    <c:v>Gen 1</c:v>
-                  </c:pt>
-                  <c:pt idx="1">
-                    <c:v>Gen 2</c:v>
-                  </c:pt>
-                  <c:pt idx="2">
-                    <c:v>Gen 3</c:v>
-                  </c:pt>
-                  <c:pt idx="3">
-                    <c:v>Gen 4</c:v>
-                  </c:pt>
-                  <c:pt idx="4">
-                    <c:v>Gen 5</c:v>
-                  </c:pt>
-                  <c:pt idx="5">
-                    <c:v>Gen 6</c:v>
-                  </c:pt>
-                  <c:pt idx="6">
-                    <c:v>Gen 7</c:v>
-                  </c:pt>
-                </c:lvl>
-              </c:multiLvlStrCache>
-            </c:multiLvlStrRef>
+                <c:pt idx="0">
+                  <c:v>Gen 1</c:v>
+                </c:pt>
+                <c:pt idx="1">
+                  <c:v>Gen 2</c:v>
+                </c:pt>
+                <c:pt idx="2">
+                  <c:v>Gen 3</c:v>
+                </c:pt>
+                <c:pt idx="3">
+                  <c:v>Gen 4</c:v>
+                </c:pt>
+                <c:pt idx="4">
+                  <c:v>Gen 5</c:v>
+                </c:pt>
+                <c:pt idx="5">
+                  <c:v>Gen 6</c:v>
+                </c:pt>
+                <c:pt idx="6">
+                  <c:v>Gen 7</c:v>
+                </c:pt>
+              </c:strCache>
+            </c:strRef>
           </c:cat>
           <c:val>
             <c:numRef>
@@ -568,36 +713,23 @@
               </c:numCache>
             </c:numRef>
           </c:val>
+          <c:extLst>
+            <c:ext xmlns:c16="http://schemas.microsoft.com/office/drawing/2014/chart" uri="{C3380CC4-5D6E-409C-BE32-E72D297353CC}">
+              <c16:uniqueId val="{00000000-284C-41FC-937D-4D4F5789DF08}"/>
+            </c:ext>
+          </c:extLst>
         </c:ser>
         <c:dLbls>
-          <c:numFmt formatCode="#,##0" sourceLinked="0"/>
-          <c:txPr>
-            <a:bodyPr/>
-            <a:lstStyle/>
-            <a:p>
-              <a:pPr>
-                <a:defRPr b="0" i="0" strike="noStrike" sz="1000" u="none">
-                  <a:solidFill>
-                    <a:srgbClr val="FFFFFF"/>
-                  </a:solidFill>
-                  <a:latin typeface="Arial"/>
-                </a:defRPr>
-              </a:pPr>
-            </a:p>
-          </c:txPr>
           <c:showLegendKey val="0"/>
           <c:showVal val="1"/>
           <c:showCatName val="0"/>
           <c:showSerName val="0"/>
           <c:showPercent val="0"/>
           <c:showBubbleSize val="0"/>
-          <c:showLeaderLines val="0"/>
         </c:dLbls>
         <c:gapWidth val="150"/>
-        <c:overlap val="0"/>
         <c:axId val="2094734554"/>
         <c:axId val="2094734552"/>
-        <c:axId val="2094734556"/>
       </c:barChart>
       <c:catAx>
         <c:axId val="2094734554"/>
@@ -638,6 +770,7 @@
         <c:crosses val="autoZero"/>
         <c:auto val="1"/>
         <c:lblAlgn val="ctr"/>
+        <c:lblOffset val="100"/>
         <c:noMultiLvlLbl val="1"/>
       </c:catAx>
       <c:valAx>
@@ -700,6 +833,7 @@
     </c:plotArea>
     <c:plotVisOnly val="1"/>
     <c:dispBlanksAs val="span"/>
+    <c:showDLblsOverMax val="1"/>
   </c:chart>
   <c:spPr>
     <a:solidFill>
@@ -717,9 +851,11 @@
 </file>
 
 <file path=ppt/charts/chart3.xml><?xml version="1.0" encoding="utf-8"?>
-<c:chartSpace xmlns:c="http://schemas.openxmlformats.org/drawingml/2006/chart" xmlns:a="http://schemas.openxmlformats.org/drawingml/2006/main" xmlns:r="http://schemas.openxmlformats.org/officeDocument/2006/relationships">
+<c:chartSpace xmlns:c="http://schemas.openxmlformats.org/drawingml/2006/chart" xmlns:a="http://schemas.openxmlformats.org/drawingml/2006/main" xmlns:r="http://schemas.openxmlformats.org/officeDocument/2006/relationships" xmlns:c16r2="http://schemas.microsoft.com/office/drawing/2015/06/chart">
   <c:date1904 val="0"/>
+  <c:lang val="en-US"/>
   <c:roundedCorners val="1"/>
+  <c:style val="2"/>
   <c:chart>
     <c:autoTitleDeleted val="1"/>
     <c:plotArea>
@@ -749,54 +885,28 @@
             <a:effectLst/>
           </c:spPr>
           <c:invertIfNegative val="0"/>
-          <c:dLbls>
-            <c:numFmt formatCode="#,##0" sourceLinked="0"/>
-            <c:txPr>
-              <a:bodyPr/>
-              <a:lstStyle/>
-              <a:p>
-                <a:pPr>
-                  <a:defRPr b="0" i="0" strike="noStrike" sz="1200" u="none">
-                    <a:solidFill>
-                      <a:srgbClr val="000000"/>
-                    </a:solidFill>
-                    <a:latin typeface="Arial"/>
-                  </a:defRPr>
-                </a:pPr>
-              </a:p>
-            </c:txPr>
-            <c:showLegendKey val="0"/>
-            <c:showVal val="0"/>
-            <c:showCatName val="0"/>
-            <c:showSerName val="0"/>
-            <c:showPercent val="0"/>
-            <c:showBubbleSize val="0"/>
-            <c:showLeaderLines val="0"/>
-          </c:dLbls>
           <c:cat>
-            <c:multiLvlStrRef>
+            <c:strRef>
               <c:f>Sheet1!$A$2:$A$6</c:f>
-              <c:multiLvlStrCache>
+              <c:strCache>
                 <c:ptCount val="5"/>
-                <c:lvl>
-                  <c:pt idx="0">
-                    <c:v>Yr 1</c:v>
-                  </c:pt>
-                  <c:pt idx="1">
-                    <c:v>Yr 2</c:v>
-                  </c:pt>
-                  <c:pt idx="2">
-                    <c:v>Yr 3</c:v>
-                  </c:pt>
-                  <c:pt idx="3">
-                    <c:v>Yr 4</c:v>
-                  </c:pt>
-                  <c:pt idx="4">
-                    <c:v>Yr 5 (Mature)</c:v>
-                  </c:pt>
-                </c:lvl>
-              </c:multiLvlStrCache>
-            </c:multiLvlStrRef>
+                <c:pt idx="0">
+                  <c:v>Yr 1</c:v>
+                </c:pt>
+                <c:pt idx="1">
+                  <c:v>Yr 2</c:v>
+                </c:pt>
+                <c:pt idx="2">
+                  <c:v>Yr 3</c:v>
+                </c:pt>
+                <c:pt idx="3">
+                  <c:v>Yr 4</c:v>
+                </c:pt>
+                <c:pt idx="4">
+                  <c:v>Yr 5 (Mature)</c:v>
+                </c:pt>
+              </c:strCache>
+            </c:strRef>
           </c:cat>
           <c:val>
             <c:numRef>
@@ -822,6 +932,11 @@
               </c:numCache>
             </c:numRef>
           </c:val>
+          <c:extLst>
+            <c:ext xmlns:c16="http://schemas.microsoft.com/office/drawing/2014/chart" uri="{C3380CC4-5D6E-409C-BE32-E72D297353CC}">
+              <c16:uniqueId val="{00000000-E54B-4B73-8C80-1CD39C2921FE}"/>
+            </c:ext>
+          </c:extLst>
         </c:ser>
         <c:ser>
           <c:idx val="1"/>
@@ -844,54 +959,28 @@
             <a:effectLst/>
           </c:spPr>
           <c:invertIfNegative val="0"/>
-          <c:dLbls>
-            <c:numFmt formatCode="#,##0" sourceLinked="0"/>
-            <c:txPr>
-              <a:bodyPr/>
-              <a:lstStyle/>
-              <a:p>
-                <a:pPr>
-                  <a:defRPr b="0" i="0" strike="noStrike" sz="1200" u="none">
-                    <a:solidFill>
-                      <a:srgbClr val="000000"/>
-                    </a:solidFill>
-                    <a:latin typeface="Arial"/>
-                  </a:defRPr>
-                </a:pPr>
-              </a:p>
-            </c:txPr>
-            <c:showLegendKey val="0"/>
-            <c:showVal val="0"/>
-            <c:showCatName val="0"/>
-            <c:showSerName val="0"/>
-            <c:showPercent val="0"/>
-            <c:showBubbleSize val="0"/>
-            <c:showLeaderLines val="0"/>
-          </c:dLbls>
           <c:cat>
-            <c:multiLvlStrRef>
+            <c:strRef>
               <c:f>Sheet1!$A$2:$A$6</c:f>
-              <c:multiLvlStrCache>
+              <c:strCache>
                 <c:ptCount val="5"/>
-                <c:lvl>
-                  <c:pt idx="0">
-                    <c:v>Yr 1</c:v>
-                  </c:pt>
-                  <c:pt idx="1">
-                    <c:v>Yr 2</c:v>
-                  </c:pt>
-                  <c:pt idx="2">
-                    <c:v>Yr 3</c:v>
-                  </c:pt>
-                  <c:pt idx="3">
-                    <c:v>Yr 4</c:v>
-                  </c:pt>
-                  <c:pt idx="4">
-                    <c:v>Yr 5 (Mature)</c:v>
-                  </c:pt>
-                </c:lvl>
-              </c:multiLvlStrCache>
-            </c:multiLvlStrRef>
+                <c:pt idx="0">
+                  <c:v>Yr 1</c:v>
+                </c:pt>
+                <c:pt idx="1">
+                  <c:v>Yr 2</c:v>
+                </c:pt>
+                <c:pt idx="2">
+                  <c:v>Yr 3</c:v>
+                </c:pt>
+                <c:pt idx="3">
+                  <c:v>Yr 4</c:v>
+                </c:pt>
+                <c:pt idx="4">
+                  <c:v>Yr 5 (Mature)</c:v>
+                </c:pt>
+              </c:strCache>
+            </c:strRef>
           </c:cat>
           <c:val>
             <c:numRef>
@@ -917,36 +1006,23 @@
               </c:numCache>
             </c:numRef>
           </c:val>
+          <c:extLst>
+            <c:ext xmlns:c16="http://schemas.microsoft.com/office/drawing/2014/chart" uri="{C3380CC4-5D6E-409C-BE32-E72D297353CC}">
+              <c16:uniqueId val="{00000001-E54B-4B73-8C80-1CD39C2921FE}"/>
+            </c:ext>
+          </c:extLst>
         </c:ser>
         <c:dLbls>
-          <c:numFmt formatCode="#,##0" sourceLinked="0"/>
-          <c:txPr>
-            <a:bodyPr/>
-            <a:lstStyle/>
-            <a:p>
-              <a:pPr>
-                <a:defRPr b="0" i="0" strike="noStrike" sz="1200" u="none">
-                  <a:solidFill>
-                    <a:srgbClr val="000000"/>
-                  </a:solidFill>
-                  <a:latin typeface="Arial"/>
-                </a:defRPr>
-              </a:pPr>
-            </a:p>
-          </c:txPr>
           <c:showLegendKey val="0"/>
           <c:showVal val="0"/>
           <c:showCatName val="0"/>
           <c:showSerName val="0"/>
           <c:showPercent val="0"/>
           <c:showBubbleSize val="0"/>
-          <c:showLeaderLines val="0"/>
         </c:dLbls>
         <c:gapWidth val="150"/>
-        <c:overlap val="0"/>
         <c:axId val="2094734554"/>
         <c:axId val="2094734552"/>
-        <c:axId val="2094734556"/>
       </c:barChart>
       <c:catAx>
         <c:axId val="2094734554"/>
@@ -987,6 +1063,7 @@
         <c:crosses val="autoZero"/>
         <c:auto val="1"/>
         <c:lblAlgn val="ctr"/>
+        <c:lblOffset val="100"/>
         <c:noMultiLvlLbl val="1"/>
       </c:catAx>
       <c:valAx>
@@ -1053,6 +1130,7 @@
     </c:legend>
     <c:plotVisOnly val="1"/>
     <c:dispBlanksAs val="span"/>
+    <c:showDLblsOverMax val="1"/>
   </c:chart>
   <c:spPr>
     <a:solidFill>
@@ -1104,7 +1182,7 @@
         <p:spPr>
           <a:xfrm>
             <a:off x="0" y="0"/>
-            <a:ext cx="2971800" cy="458788"/>
+            <a:ext cx="2228850" cy="458788"/>
           </a:xfrm>
           <a:prstGeom prst="rect">
             <a:avLst/>
@@ -1134,8 +1212,8 @@
         </p:nvSpPr>
         <p:spPr>
           <a:xfrm>
-            <a:off x="3884613" y="0"/>
-            <a:ext cx="2971800" cy="458788"/>
+            <a:off x="2913063" y="0"/>
+            <a:ext cx="2228850" cy="458788"/>
           </a:xfrm>
           <a:prstGeom prst="rect">
             <a:avLst/>
@@ -1149,9 +1227,8 @@
             </a:lvl1pPr>
           </a:lstStyle>
           <a:p>
-            <a:fld id="{5282F153-3F37-0F45-9E97-73ACFA13230C}" type="datetimeFigureOut">
-              <a:rPr lang="en-US"/>
-              <a:t>7/23/19</a:t>
+            <a:fld id="{12D8B5F7-C751-460F-A4E8-A72DB48BA422}" type="datetimeFigureOut">
+              <a:t>4/1/2026</a:t>
             </a:fld>
             <a:endParaRPr lang="en-US"/>
           </a:p>
@@ -1169,7 +1246,7 @@
         </p:nvSpPr>
         <p:spPr>
           <a:xfrm>
-            <a:off x="685800" y="1143000"/>
+            <a:off x="-171450" y="1143000"/>
             <a:ext cx="5486400" cy="3086100"/>
           </a:xfrm>
           <a:prstGeom prst="rect">
@@ -1202,8 +1279,8 @@
         </p:nvSpPr>
         <p:spPr>
           <a:xfrm>
-            <a:off x="685800" y="4400550"/>
-            <a:ext cx="5486400" cy="3600450"/>
+            <a:off x="514350" y="4400550"/>
+            <a:ext cx="4114800" cy="3600450"/>
           </a:xfrm>
           <a:prstGeom prst="rect">
             <a:avLst/>
@@ -1262,7 +1339,7 @@
         <p:spPr>
           <a:xfrm>
             <a:off x="0" y="8685213"/>
-            <a:ext cx="2971800" cy="458787"/>
+            <a:ext cx="2228850" cy="458787"/>
           </a:xfrm>
           <a:prstGeom prst="rect">
             <a:avLst/>
@@ -1292,8 +1369,8 @@
         </p:nvSpPr>
         <p:spPr>
           <a:xfrm>
-            <a:off x="3884613" y="8685213"/>
-            <a:ext cx="2971800" cy="458787"/>
+            <a:off x="2913063" y="8685213"/>
+            <a:ext cx="2228850" cy="458787"/>
           </a:xfrm>
           <a:prstGeom prst="rect">
             <a:avLst/>
@@ -1307,8 +1384,7 @@
             </a:lvl1pPr>
           </a:lstStyle>
           <a:p>
-            <a:fld id="{CE5E9CC1-C706-0F49-92D6-E571CC5EEA8F}" type="slidenum">
-              <a:rPr lang="en-US"/>
+            <a:fld id="{254A99A5-A039-4C07-80CD-18E245AC0B38}" type="slidenum">
               <a:t>‹#›</a:t>
             </a:fld>
             <a:endParaRPr lang="en-US"/>
@@ -1318,7 +1394,7 @@
     </p:spTree>
     <p:extLst>
       <p:ext uri="{BB962C8B-B14F-4D97-AF65-F5344CB8AC3E}">
-        <p14:creationId xmlns:p14="http://schemas.microsoft.com/office/powerpoint/2010/main" val="1024086991"/>
+        <p14:creationId xmlns:p14="http://schemas.microsoft.com/office/powerpoint/2010/main" val="2984742520"/>
       </p:ext>
     </p:extLst>
   </p:cSld>
@@ -1462,10 +1538,6 @@
           <a:bodyPr/>
           <a:lstStyle/>
           <a:p>
-            <a:r>
-              <a:rPr lang="en-US" dirty="0"/>
-              <a:t/>
-            </a:r>
             <a:endParaRPr lang="en-US" dirty="0"/>
           </a:p>
         </p:txBody>
@@ -1550,10 +1622,6 @@
           <a:bodyPr/>
           <a:lstStyle/>
           <a:p>
-            <a:r>
-              <a:rPr lang="en-US" dirty="0"/>
-              <a:t/>
-            </a:r>
             <a:endParaRPr lang="en-US" dirty="0"/>
           </a:p>
         </p:txBody>
@@ -1638,10 +1706,6 @@
           <a:bodyPr/>
           <a:lstStyle/>
           <a:p>
-            <a:r>
-              <a:rPr lang="en-US" dirty="0"/>
-              <a:t/>
-            </a:r>
             <a:endParaRPr lang="en-US" dirty="0"/>
           </a:p>
         </p:txBody>
@@ -1726,10 +1790,6 @@
           <a:bodyPr/>
           <a:lstStyle/>
           <a:p>
-            <a:r>
-              <a:rPr lang="en-US" dirty="0"/>
-              <a:t/>
-            </a:r>
             <a:endParaRPr lang="en-US" dirty="0"/>
           </a:p>
         </p:txBody>
@@ -1814,10 +1874,6 @@
           <a:bodyPr/>
           <a:lstStyle/>
           <a:p>
-            <a:r>
-              <a:rPr lang="en-US" dirty="0"/>
-              <a:t/>
-            </a:r>
             <a:endParaRPr lang="en-US" dirty="0"/>
           </a:p>
         </p:txBody>
@@ -1902,10 +1958,6 @@
           <a:bodyPr/>
           <a:lstStyle/>
           <a:p>
-            <a:r>
-              <a:rPr lang="en-US" dirty="0"/>
-              <a:t/>
-            </a:r>
             <a:endParaRPr lang="en-US" dirty="0"/>
           </a:p>
         </p:txBody>
@@ -1990,10 +2042,6 @@
           <a:bodyPr/>
           <a:lstStyle/>
           <a:p>
-            <a:r>
-              <a:rPr lang="en-US" dirty="0"/>
-              <a:t/>
-            </a:r>
             <a:endParaRPr lang="en-US" dirty="0"/>
           </a:p>
         </p:txBody>
@@ -2078,10 +2126,6 @@
           <a:bodyPr/>
           <a:lstStyle/>
           <a:p>
-            <a:r>
-              <a:rPr lang="en-US" dirty="0"/>
-              <a:t/>
-            </a:r>
             <a:endParaRPr lang="en-US" dirty="0"/>
           </a:p>
         </p:txBody>
@@ -2166,10 +2210,6 @@
           <a:bodyPr/>
           <a:lstStyle/>
           <a:p>
-            <a:r>
-              <a:rPr lang="en-US" dirty="0"/>
-              <a:t/>
-            </a:r>
             <a:endParaRPr lang="en-US" dirty="0"/>
           </a:p>
         </p:txBody>
@@ -2254,10 +2294,6 @@
           <a:bodyPr/>
           <a:lstStyle/>
           <a:p>
-            <a:r>
-              <a:rPr lang="en-US" dirty="0"/>
-              <a:t/>
-            </a:r>
             <a:endParaRPr lang="en-US" dirty="0"/>
           </a:p>
         </p:txBody>
@@ -2342,10 +2378,6 @@
           <a:bodyPr/>
           <a:lstStyle/>
           <a:p>
-            <a:r>
-              <a:rPr lang="en-US" dirty="0"/>
-              <a:t/>
-            </a:r>
             <a:endParaRPr lang="en-US" dirty="0"/>
           </a:p>
         </p:txBody>
@@ -2419,6 +2451,11 @@
 <file path=ppt/slideMasters/slideMaster1.xml><?xml version="1.0" encoding="utf-8"?>
 <p:sldMaster xmlns:a="http://schemas.openxmlformats.org/drawingml/2006/main" xmlns:r="http://schemas.openxmlformats.org/officeDocument/2006/relationships" xmlns:p="http://schemas.openxmlformats.org/presentationml/2006/main">
   <p:cSld>
+    <p:bg>
+      <p:bgRef idx="1001">
+        <a:schemeClr val="bg1"/>
+      </p:bgRef>
+    </p:bg>
     <p:spTree>
       <p:nvGrpSpPr>
         <p:cNvPr id="1" name=""/>
@@ -2701,6 +2738,7 @@
         <a:solidFill>
           <a:srgbClr val="1A2A1A"/>
         </a:solidFill>
+        <a:effectLst/>
       </p:bgPr>
     </p:bg>
     <p:spTree>
@@ -2744,14 +2782,14 @@
       </p:sp>
       <p:pic>
         <p:nvPicPr>
-          <p:cNvPr id="3" name="Image 0" descr="preencoded.png">    </p:cNvPr>
+          <p:cNvPr id="3" name="Image 0" descr="preencoded.png"/>
           <p:cNvPicPr>
             <a:picLocks noChangeAspect="1"/>
           </p:cNvPicPr>
           <p:nvPr/>
         </p:nvPicPr>
         <p:blipFill>
-          <a:blip r:embed="rId1">
+          <a:blip r:embed="rId3">
             <a:alphaModFix amt="18000"/>
           </a:blip>
           <a:stretch>
@@ -2789,11 +2827,11 @@
           <a:bodyPr wrap="square" lIns="0" tIns="0" rIns="0" bIns="0" rtlCol="0" anchor="ctr"/>
           <a:lstStyle/>
           <a:p>
-            <a:pPr indent="0" marL="0">
-              <a:buNone/>
-            </a:pPr>
-            <a:r>
-              <a:rPr lang="en-US" sz="900" b="1" spc="300" kern="0" dirty="0">
+            <a:pPr marL="0" indent="0">
+              <a:buNone/>
+            </a:pPr>
+            <a:r>
+              <a:rPr lang="en-US" sz="900" b="1" kern="0" spc="300" dirty="0">
                 <a:solidFill>
                   <a:srgbClr val="97BC62"/>
                 </a:solidFill>
@@ -2828,7 +2866,7 @@
           <a:bodyPr wrap="square" lIns="0" tIns="0" rIns="0" bIns="0" rtlCol="0" anchor="ctr"/>
           <a:lstStyle/>
           <a:p>
-            <a:pPr indent="0" marL="0">
+            <a:pPr marL="0" indent="0">
               <a:lnSpc>
                 <a:spcPct val="110000"/>
               </a:lnSpc>
@@ -2848,7 +2886,7 @@
             <a:endParaRPr lang="en-US" sz="5600" dirty="0"/>
           </a:p>
           <a:p>
-            <a:pPr indent="0" marL="0">
+            <a:pPr marL="0" indent="0">
               <a:lnSpc>
                 <a:spcPct val="110000"/>
               </a:lnSpc>
@@ -2890,7 +2928,7 @@
           <a:bodyPr wrap="square" lIns="0" tIns="0" rIns="0" bIns="0" rtlCol="0" anchor="ctr"/>
           <a:lstStyle/>
           <a:p>
-            <a:pPr indent="0" marL="0">
+            <a:pPr marL="0" indent="0">
               <a:lnSpc>
                 <a:spcPct val="140000"/>
               </a:lnSpc>
@@ -2910,7 +2948,7 @@
             <a:endParaRPr lang="en-US" sz="1600" dirty="0"/>
           </a:p>
           <a:p>
-            <a:pPr indent="0" marL="0">
+            <a:pPr marL="0" indent="0">
               <a:lnSpc>
                 <a:spcPct val="140000"/>
               </a:lnSpc>
@@ -2977,7 +3015,7 @@
           <a:bodyPr wrap="square" lIns="0" tIns="0" rIns="0" bIns="0" rtlCol="0" anchor="ctr"/>
           <a:lstStyle/>
           <a:p>
-            <a:pPr algn="ctr" indent="0" marL="0">
+            <a:pPr marL="0" indent="0" algn="ctr">
               <a:buNone/>
             </a:pPr>
             <a:r>
@@ -3011,6 +3049,7 @@
         <a:solidFill>
           <a:srgbClr val="F2EFE5"/>
         </a:solidFill>
+        <a:effectLst/>
       </p:bgPr>
     </p:bg>
     <p:spTree>
@@ -3073,11 +3112,11 @@
           <a:bodyPr wrap="square" lIns="0" tIns="0" rIns="0" bIns="0" rtlCol="0" anchor="ctr"/>
           <a:lstStyle/>
           <a:p>
-            <a:pPr indent="0" marL="0">
-              <a:buNone/>
-            </a:pPr>
-            <a:r>
-              <a:rPr lang="en-US" sz="900" b="1" spc="300" kern="0" dirty="0">
+            <a:pPr marL="0" indent="0">
+              <a:buNone/>
+            </a:pPr>
+            <a:r>
+              <a:rPr lang="en-US" sz="900" b="1" kern="0" spc="300" dirty="0">
                 <a:solidFill>
                   <a:srgbClr val="97BC62"/>
                 </a:solidFill>
@@ -3112,7 +3151,7 @@
           <a:bodyPr wrap="square" lIns="0" tIns="0" rIns="0" bIns="0" rtlCol="0" anchor="ctr"/>
           <a:lstStyle/>
           <a:p>
-            <a:pPr indent="0" marL="0">
+            <a:pPr marL="0" indent="0">
               <a:buNone/>
             </a:pPr>
             <a:r>
@@ -3154,7 +3193,7 @@
             <a:prstDash val="solid"/>
           </a:ln>
           <a:effectLst>
-            <a:outerShdw sx="100000" sy="100000" kx="0" ky="0" algn="bl" rotWithShape="0" blurRad="101600" dist="38100" dir="8100000">
+            <a:outerShdw blurRad="101600" dist="38100" dir="8100000" algn="bl" rotWithShape="0">
               <a:srgbClr val="000000">
                 <a:alpha val="18000"/>
               </a:srgbClr>
@@ -3208,7 +3247,7 @@
           <a:bodyPr wrap="square" lIns="0" tIns="0" rIns="0" bIns="0" rtlCol="0" anchor="ctr"/>
           <a:lstStyle/>
           <a:p>
-            <a:pPr indent="0" marL="0">
+            <a:pPr marL="0" indent="0">
               <a:buNone/>
             </a:pPr>
             <a:r>
@@ -3247,7 +3286,7 @@
           <a:bodyPr wrap="square" lIns="0" tIns="0" rIns="0" bIns="0" rtlCol="0" anchor="ctr"/>
           <a:lstStyle/>
           <a:p>
-            <a:pPr indent="0" marL="0">
+            <a:pPr marL="0" indent="0">
               <a:buNone/>
             </a:pPr>
             <a:r>
@@ -3286,7 +3325,7 @@
           <a:bodyPr wrap="square" lIns="0" tIns="0" rIns="0" bIns="0" rtlCol="0" anchor="ctr"/>
           <a:lstStyle/>
           <a:p>
-            <a:pPr indent="0" marL="0">
+            <a:pPr marL="0" indent="0">
               <a:lnSpc>
                 <a:spcPct val="125000"/>
               </a:lnSpc>
@@ -3425,7 +3464,7 @@
             <a:prstDash val="solid"/>
           </a:ln>
           <a:effectLst>
-            <a:outerShdw sx="100000" sy="100000" kx="0" ky="0" algn="bl" rotWithShape="0" blurRad="101600" dist="38100" dir="8100000">
+            <a:outerShdw blurRad="101600" dist="38100" dir="8100000" algn="bl" rotWithShape="0">
               <a:srgbClr val="000000">
                 <a:alpha val="18000"/>
               </a:srgbClr>
@@ -3479,7 +3518,7 @@
           <a:bodyPr wrap="square" lIns="0" tIns="0" rIns="0" bIns="0" rtlCol="0" anchor="ctr"/>
           <a:lstStyle/>
           <a:p>
-            <a:pPr indent="0" marL="0">
+            <a:pPr marL="0" indent="0">
               <a:buNone/>
             </a:pPr>
             <a:r>
@@ -3518,7 +3557,7 @@
           <a:bodyPr wrap="square" lIns="0" tIns="0" rIns="0" bIns="0" rtlCol="0" anchor="ctr"/>
           <a:lstStyle/>
           <a:p>
-            <a:pPr indent="0" marL="0">
+            <a:pPr marL="0" indent="0">
               <a:buNone/>
             </a:pPr>
             <a:r>
@@ -3557,7 +3596,7 @@
           <a:bodyPr wrap="square" lIns="0" tIns="0" rIns="0" bIns="0" rtlCol="0" anchor="ctr"/>
           <a:lstStyle/>
           <a:p>
-            <a:pPr indent="0" marL="0">
+            <a:pPr marL="0" indent="0">
               <a:lnSpc>
                 <a:spcPct val="125000"/>
               </a:lnSpc>
@@ -3693,7 +3732,7 @@
           <a:bodyPr wrap="square" lIns="0" tIns="0" rIns="0" bIns="0" rtlCol="0" anchor="ctr"/>
           <a:lstStyle/>
           <a:p>
-            <a:pPr algn="ctr" indent="0" marL="0">
+            <a:pPr marL="0" indent="0" algn="ctr">
               <a:buNone/>
             </a:pPr>
             <a:r>
@@ -3727,6 +3766,7 @@
         <a:solidFill>
           <a:srgbClr val="1A2A1A"/>
         </a:solidFill>
+        <a:effectLst/>
       </p:bgPr>
     </p:bg>
     <p:spTree>
@@ -3770,14 +3810,14 @@
       </p:sp>
       <p:pic>
         <p:nvPicPr>
-          <p:cNvPr id="3" name="Image 0" descr="preencoded.png">    </p:cNvPr>
+          <p:cNvPr id="3" name="Image 0" descr="preencoded.png"/>
           <p:cNvPicPr>
             <a:picLocks noChangeAspect="1"/>
           </p:cNvPicPr>
           <p:nvPr/>
         </p:nvPicPr>
         <p:blipFill>
-          <a:blip r:embed="rId1">
+          <a:blip r:embed="rId3">
             <a:alphaModFix amt="18000"/>
           </a:blip>
           <a:stretch>
@@ -3815,11 +3855,11 @@
           <a:bodyPr wrap="square" lIns="0" tIns="0" rIns="0" bIns="0" rtlCol="0" anchor="ctr"/>
           <a:lstStyle/>
           <a:p>
-            <a:pPr indent="0" marL="0">
-              <a:buNone/>
-            </a:pPr>
-            <a:r>
-              <a:rPr lang="en-US" sz="900" b="1" spc="300" kern="0" dirty="0">
+            <a:pPr marL="0" indent="0">
+              <a:buNone/>
+            </a:pPr>
+            <a:r>
+              <a:rPr lang="en-US" sz="900" b="1" kern="0" spc="300" dirty="0">
                 <a:solidFill>
                   <a:srgbClr val="97BC62"/>
                 </a:solidFill>
@@ -3854,7 +3894,7 @@
           <a:bodyPr wrap="square" lIns="0" tIns="0" rIns="0" bIns="0" rtlCol="0" anchor="ctr"/>
           <a:lstStyle/>
           <a:p>
-            <a:pPr indent="0" marL="0">
+            <a:pPr marL="0" indent="0">
               <a:lnSpc>
                 <a:spcPct val="115000"/>
               </a:lnSpc>
@@ -3874,7 +3914,7 @@
             <a:endParaRPr lang="en-US" sz="3000" dirty="0"/>
           </a:p>
           <a:p>
-            <a:pPr indent="0" marL="0">
+            <a:pPr marL="0" indent="0">
               <a:lnSpc>
                 <a:spcPct val="115000"/>
               </a:lnSpc>
@@ -3894,7 +3934,7 @@
             <a:endParaRPr lang="en-US" sz="3000" dirty="0"/>
           </a:p>
           <a:p>
-            <a:pPr indent="0" marL="0">
+            <a:pPr marL="0" indent="0">
               <a:lnSpc>
                 <a:spcPct val="115000"/>
               </a:lnSpc>
@@ -3936,7 +3976,7 @@
           <a:bodyPr wrap="square" lIns="0" tIns="0" rIns="0" bIns="0" rtlCol="0" anchor="ctr"/>
           <a:lstStyle/>
           <a:p>
-            <a:pPr indent="0" marL="0">
+            <a:pPr marL="0" indent="0">
               <a:lnSpc>
                 <a:spcPct val="135000"/>
               </a:lnSpc>
@@ -3956,7 +3996,7 @@
             <a:endParaRPr lang="en-US" sz="1400" dirty="0"/>
           </a:p>
           <a:p>
-            <a:pPr indent="0" marL="0">
+            <a:pPr marL="0" indent="0">
               <a:lnSpc>
                 <a:spcPct val="135000"/>
               </a:lnSpc>
@@ -4001,7 +4041,7 @@
             <a:prstDash val="solid"/>
           </a:ln>
           <a:effectLst>
-            <a:outerShdw sx="100000" sy="100000" kx="0" ky="0" algn="bl" rotWithShape="0" blurRad="101600" dist="38100" dir="8100000">
+            <a:outerShdw blurRad="101600" dist="38100" dir="8100000" algn="bl" rotWithShape="0">
               <a:srgbClr val="000000">
                 <a:alpha val="18000"/>
               </a:srgbClr>
@@ -4030,7 +4070,7 @@
           <a:bodyPr wrap="square" lIns="0" tIns="0" rIns="0" bIns="0" rtlCol="0" anchor="ctr"/>
           <a:lstStyle/>
           <a:p>
-            <a:pPr indent="0" marL="0">
+            <a:pPr marL="0" indent="0">
               <a:buNone/>
             </a:pPr>
             <a:r>
@@ -4069,7 +4109,7 @@
           <a:bodyPr wrap="square" lIns="0" tIns="0" rIns="0" bIns="0" rtlCol="0" anchor="ctr"/>
           <a:lstStyle/>
           <a:p>
-            <a:pPr indent="0" marL="0">
+            <a:pPr marL="0" indent="0">
               <a:lnSpc>
                 <a:spcPct val="130000"/>
               </a:lnSpc>
@@ -4089,7 +4129,7 @@
             <a:endParaRPr lang="en-US" sz="1200" dirty="0"/>
           </a:p>
           <a:p>
-            <a:pPr indent="0" marL="0">
+            <a:pPr marL="0" indent="0">
               <a:lnSpc>
                 <a:spcPct val="130000"/>
               </a:lnSpc>
@@ -4156,21 +4196,23 @@
           <a:bodyPr wrap="square" lIns="0" tIns="0" rIns="0" bIns="0" rtlCol="0" anchor="ctr"/>
           <a:lstStyle/>
           <a:p>
-            <a:pPr algn="ctr" indent="0" marL="0">
-              <a:buNone/>
-            </a:pPr>
-            <a:r>
-              <a:rPr lang="en-US" sz="1050" dirty="0">
+            <a:pPr algn="ctr"/>
+            <a:r>
+              <a:rPr lang="en-US" sz="1050">
                 <a:solidFill>
                   <a:srgbClr val="FFFFFF"/>
                 </a:solidFill>
-                <a:latin typeface="Calibri" pitchFamily="34" charset="0"/>
-                <a:ea typeface="Calibri" pitchFamily="34" charset="-122"/>
-                <a:cs typeface="Calibri" pitchFamily="34" charset="-120"/>
-              </a:rPr>
-              <a:t>Open Source  ·  B-Corp Governed  ·  Community Owned  ·  Designed to Replicate</a:t>
-            </a:r>
-            <a:endParaRPr lang="en-US" sz="1050" dirty="0"/>
+                <a:latin typeface="Calibri"/>
+                <a:ea typeface="Calibri"/>
+                <a:cs typeface="Calibri"/>
+              </a:rPr>
+              <a:t>Open Source  ·  B-Corp Governed ·  Designed to Replicate</a:t>
+            </a:r>
+            <a:endParaRPr lang="en-US" sz="1050">
+              <a:latin typeface="Calibri"/>
+              <a:ea typeface="Calibri"/>
+              <a:cs typeface="Calibri"/>
+            </a:endParaRPr>
           </a:p>
         </p:txBody>
       </p:sp>
@@ -4190,6 +4232,7 @@
         <a:solidFill>
           <a:srgbClr val="F2EFE5"/>
         </a:solidFill>
+        <a:effectLst/>
       </p:bgPr>
     </p:bg>
     <p:spTree>
@@ -4252,11 +4295,11 @@
           <a:bodyPr wrap="square" lIns="0" tIns="0" rIns="0" bIns="0" rtlCol="0" anchor="ctr"/>
           <a:lstStyle/>
           <a:p>
-            <a:pPr indent="0" marL="0">
-              <a:buNone/>
-            </a:pPr>
-            <a:r>
-              <a:rPr lang="en-US" sz="900" b="1" spc="300" kern="0" dirty="0">
+            <a:pPr marL="0" indent="0">
+              <a:buNone/>
+            </a:pPr>
+            <a:r>
+              <a:rPr lang="en-US" sz="900" b="1" kern="0" spc="300" dirty="0">
                 <a:solidFill>
                   <a:srgbClr val="97BC62"/>
                 </a:solidFill>
@@ -4291,7 +4334,7 @@
           <a:bodyPr wrap="square" lIns="0" tIns="0" rIns="0" bIns="0" rtlCol="0" anchor="ctr"/>
           <a:lstStyle/>
           <a:p>
-            <a:pPr indent="0" marL="0">
+            <a:pPr marL="0" indent="0">
               <a:buNone/>
             </a:pPr>
             <a:r>
@@ -4330,7 +4373,7 @@
           <a:bodyPr wrap="square" lIns="0" tIns="0" rIns="0" bIns="0" rtlCol="0" anchor="ctr"/>
           <a:lstStyle/>
           <a:p>
-            <a:pPr indent="0" marL="0">
+            <a:pPr marL="0" indent="0">
               <a:buNone/>
             </a:pPr>
             <a:r>
@@ -4372,7 +4415,7 @@
             <a:prstDash val="solid"/>
           </a:ln>
           <a:effectLst>
-            <a:outerShdw sx="100000" sy="100000" kx="0" ky="0" algn="bl" rotWithShape="0" blurRad="101600" dist="38100" dir="8100000">
+            <a:outerShdw blurRad="101600" dist="38100" dir="8100000" algn="bl" rotWithShape="0">
               <a:srgbClr val="000000">
                 <a:alpha val="18000"/>
               </a:srgbClr>
@@ -4407,14 +4450,14 @@
       </p:sp>
       <p:pic>
         <p:nvPicPr>
-          <p:cNvPr id="8" name="Image 0" descr="preencoded.png">    </p:cNvPr>
+          <p:cNvPr id="8" name="Image 0" descr="preencoded.png"/>
           <p:cNvPicPr>
             <a:picLocks noChangeAspect="1"/>
           </p:cNvPicPr>
           <p:nvPr/>
         </p:nvPicPr>
         <p:blipFill>
-          <a:blip r:embed="rId1"/>
+          <a:blip r:embed="rId3"/>
           <a:stretch>
             <a:fillRect/>
           </a:stretch>
@@ -4450,7 +4493,7 @@
           <a:bodyPr wrap="square" lIns="0" tIns="0" rIns="0" bIns="0" rtlCol="0" anchor="ctr"/>
           <a:lstStyle/>
           <a:p>
-            <a:pPr indent="0" marL="0">
+            <a:pPr marL="0" indent="0">
               <a:buNone/>
             </a:pPr>
             <a:r>
@@ -4489,7 +4532,7 @@
           <a:bodyPr wrap="square" lIns="0" tIns="0" rIns="0" bIns="0" rtlCol="0" anchor="ctr"/>
           <a:lstStyle/>
           <a:p>
-            <a:pPr indent="0" marL="0">
+            <a:pPr marL="0" indent="0">
               <a:lnSpc>
                 <a:spcPct val="130000"/>
               </a:lnSpc>
@@ -4534,7 +4577,7 @@
             <a:prstDash val="solid"/>
           </a:ln>
           <a:effectLst>
-            <a:outerShdw sx="100000" sy="100000" kx="0" ky="0" algn="bl" rotWithShape="0" blurRad="101600" dist="38100" dir="8100000">
+            <a:outerShdw blurRad="101600" dist="38100" dir="8100000" algn="bl" rotWithShape="0">
               <a:srgbClr val="000000">
                 <a:alpha val="18000"/>
               </a:srgbClr>
@@ -4569,14 +4612,14 @@
       </p:sp>
       <p:pic>
         <p:nvPicPr>
-          <p:cNvPr id="13" name="Image 1" descr="preencoded.png">    </p:cNvPr>
+          <p:cNvPr id="13" name="Image 1" descr="preencoded.png"/>
           <p:cNvPicPr>
             <a:picLocks noChangeAspect="1"/>
           </p:cNvPicPr>
           <p:nvPr/>
         </p:nvPicPr>
         <p:blipFill>
-          <a:blip r:embed="rId2"/>
+          <a:blip r:embed="rId4"/>
           <a:stretch>
             <a:fillRect/>
           </a:stretch>
@@ -4612,7 +4655,7 @@
           <a:bodyPr wrap="square" lIns="0" tIns="0" rIns="0" bIns="0" rtlCol="0" anchor="ctr"/>
           <a:lstStyle/>
           <a:p>
-            <a:pPr indent="0" marL="0">
+            <a:pPr marL="0" indent="0">
               <a:buNone/>
             </a:pPr>
             <a:r>
@@ -4651,7 +4694,7 @@
           <a:bodyPr wrap="square" lIns="0" tIns="0" rIns="0" bIns="0" rtlCol="0" anchor="ctr"/>
           <a:lstStyle/>
           <a:p>
-            <a:pPr indent="0" marL="0">
+            <a:pPr marL="0" indent="0">
               <a:lnSpc>
                 <a:spcPct val="130000"/>
               </a:lnSpc>
@@ -4696,7 +4739,7 @@
             <a:prstDash val="solid"/>
           </a:ln>
           <a:effectLst>
-            <a:outerShdw sx="100000" sy="100000" kx="0" ky="0" algn="bl" rotWithShape="0" blurRad="101600" dist="38100" dir="8100000">
+            <a:outerShdw blurRad="101600" dist="38100" dir="8100000" algn="bl" rotWithShape="0">
               <a:srgbClr val="000000">
                 <a:alpha val="18000"/>
               </a:srgbClr>
@@ -4731,14 +4774,14 @@
       </p:sp>
       <p:pic>
         <p:nvPicPr>
-          <p:cNvPr id="18" name="Image 2" descr="preencoded.png">    </p:cNvPr>
+          <p:cNvPr id="18" name="Image 2" descr="preencoded.png"/>
           <p:cNvPicPr>
             <a:picLocks noChangeAspect="1"/>
           </p:cNvPicPr>
           <p:nvPr/>
         </p:nvPicPr>
         <p:blipFill>
-          <a:blip r:embed="rId3"/>
+          <a:blip r:embed="rId5"/>
           <a:stretch>
             <a:fillRect/>
           </a:stretch>
@@ -4774,7 +4817,7 @@
           <a:bodyPr wrap="square" lIns="0" tIns="0" rIns="0" bIns="0" rtlCol="0" anchor="ctr"/>
           <a:lstStyle/>
           <a:p>
-            <a:pPr indent="0" marL="0">
+            <a:pPr marL="0" indent="0">
               <a:buNone/>
             </a:pPr>
             <a:r>
@@ -4813,7 +4856,7 @@
           <a:bodyPr wrap="square" lIns="0" tIns="0" rIns="0" bIns="0" rtlCol="0" anchor="ctr"/>
           <a:lstStyle/>
           <a:p>
-            <a:pPr indent="0" marL="0">
+            <a:pPr marL="0" indent="0">
               <a:lnSpc>
                 <a:spcPct val="130000"/>
               </a:lnSpc>
@@ -4858,7 +4901,7 @@
             <a:prstDash val="solid"/>
           </a:ln>
           <a:effectLst>
-            <a:outerShdw sx="100000" sy="100000" kx="0" ky="0" algn="bl" rotWithShape="0" blurRad="101600" dist="38100" dir="8100000">
+            <a:outerShdw blurRad="101600" dist="38100" dir="8100000" algn="bl" rotWithShape="0">
               <a:srgbClr val="000000">
                 <a:alpha val="18000"/>
               </a:srgbClr>
@@ -4893,14 +4936,14 @@
       </p:sp>
       <p:pic>
         <p:nvPicPr>
-          <p:cNvPr id="23" name="Image 3" descr="preencoded.png">    </p:cNvPr>
+          <p:cNvPr id="23" name="Image 3" descr="preencoded.png"/>
           <p:cNvPicPr>
             <a:picLocks noChangeAspect="1"/>
           </p:cNvPicPr>
           <p:nvPr/>
         </p:nvPicPr>
         <p:blipFill>
-          <a:blip r:embed="rId4"/>
+          <a:blip r:embed="rId6"/>
           <a:stretch>
             <a:fillRect/>
           </a:stretch>
@@ -4936,7 +4979,7 @@
           <a:bodyPr wrap="square" lIns="0" tIns="0" rIns="0" bIns="0" rtlCol="0" anchor="ctr"/>
           <a:lstStyle/>
           <a:p>
-            <a:pPr indent="0" marL="0">
+            <a:pPr marL="0" indent="0">
               <a:buNone/>
             </a:pPr>
             <a:r>
@@ -4975,7 +5018,7 @@
           <a:bodyPr wrap="square" lIns="0" tIns="0" rIns="0" bIns="0" rtlCol="0" anchor="ctr"/>
           <a:lstStyle/>
           <a:p>
-            <a:pPr indent="0" marL="0">
+            <a:pPr marL="0" indent="0">
               <a:lnSpc>
                 <a:spcPct val="130000"/>
               </a:lnSpc>
@@ -5017,7 +5060,7 @@
           <a:bodyPr wrap="square" lIns="0" tIns="0" rIns="0" bIns="0" rtlCol="0" anchor="ctr"/>
           <a:lstStyle/>
           <a:p>
-            <a:pPr algn="ctr" indent="0" marL="0">
+            <a:pPr marL="0" indent="0" algn="ctr">
               <a:buNone/>
             </a:pPr>
             <a:r>
@@ -5051,6 +5094,7 @@
         <a:solidFill>
           <a:srgbClr val="1A2A1A"/>
         </a:solidFill>
+        <a:effectLst/>
       </p:bgPr>
     </p:bg>
     <p:spTree>
@@ -5094,14 +5138,14 @@
       </p:sp>
       <p:pic>
         <p:nvPicPr>
-          <p:cNvPr id="3" name="Image 0" descr="preencoded.png">    </p:cNvPr>
+          <p:cNvPr id="3" name="Image 0" descr="preencoded.png"/>
           <p:cNvPicPr>
             <a:picLocks noChangeAspect="1"/>
           </p:cNvPicPr>
           <p:nvPr/>
         </p:nvPicPr>
         <p:blipFill>
-          <a:blip r:embed="rId1">
+          <a:blip r:embed="rId3">
             <a:alphaModFix amt="15000"/>
           </a:blip>
           <a:stretch>
@@ -5139,11 +5183,11 @@
           <a:bodyPr wrap="square" lIns="0" tIns="0" rIns="0" bIns="0" rtlCol="0" anchor="ctr"/>
           <a:lstStyle/>
           <a:p>
-            <a:pPr indent="0" marL="0">
-              <a:buNone/>
-            </a:pPr>
-            <a:r>
-              <a:rPr lang="en-US" sz="900" b="1" spc="300" kern="0" dirty="0">
+            <a:pPr marL="0" indent="0">
+              <a:buNone/>
+            </a:pPr>
+            <a:r>
+              <a:rPr lang="en-US" sz="900" b="1" kern="0" spc="300" dirty="0">
                 <a:solidFill>
                   <a:srgbClr val="E57373"/>
                 </a:solidFill>
@@ -5178,7 +5222,7 @@
           <a:bodyPr wrap="square" lIns="0" tIns="0" rIns="0" bIns="0" rtlCol="0" anchor="ctr"/>
           <a:lstStyle/>
           <a:p>
-            <a:pPr indent="0" marL="0">
+            <a:pPr marL="0" indent="0">
               <a:buNone/>
             </a:pPr>
             <a:r>
@@ -5220,7 +5264,7 @@
             <a:prstDash val="solid"/>
           </a:ln>
           <a:effectLst>
-            <a:outerShdw sx="100000" sy="100000" kx="0" ky="0" algn="bl" rotWithShape="0" blurRad="101600" dist="38100" dir="8100000">
+            <a:outerShdw blurRad="101600" dist="38100" dir="8100000" algn="bl" rotWithShape="0">
               <a:srgbClr val="000000">
                 <a:alpha val="18000"/>
               </a:srgbClr>
@@ -5249,7 +5293,7 @@
           <a:bodyPr wrap="square" lIns="0" tIns="0" rIns="0" bIns="0" rtlCol="0" anchor="ctr"/>
           <a:lstStyle/>
           <a:p>
-            <a:pPr algn="ctr" indent="0" marL="0">
+            <a:pPr marL="0" indent="0" algn="ctr">
               <a:buNone/>
             </a:pPr>
             <a:r>
@@ -5288,27 +5332,26 @@
           <a:bodyPr wrap="square" lIns="0" tIns="0" rIns="0" bIns="0" rtlCol="0" anchor="ctr"/>
           <a:lstStyle/>
           <a:p>
-            <a:pPr algn="ctr" indent="0" marL="0">
+            <a:pPr algn="ctr">
               <a:lnSpc>
                 <a:spcPct val="120000"/>
               </a:lnSpc>
-              <a:buNone/>
-            </a:pPr>
-            <a:r>
-              <a:rPr lang="en-US" sz="1050" dirty="0">
+            </a:pPr>
+            <a:r>
+              <a:rPr lang="en-US" sz="1050">
                 <a:solidFill>
                   <a:srgbClr val="D9CEB2"/>
                 </a:solidFill>
-                <a:latin typeface="Calibri" pitchFamily="34" charset="0"/>
-                <a:ea typeface="Calibri" pitchFamily="34" charset="-122"/>
-                <a:cs typeface="Calibri" pitchFamily="34" charset="-120"/>
-              </a:rPr>
-              <a:t>of all permafrost</a:t>
+                <a:latin typeface="Calibri"/>
+                <a:ea typeface="Calibri"/>
+                <a:cs typeface="Calibri"/>
+              </a:rPr>
+              <a:t>of all permafrost was</a:t>
             </a:r>
             <a:endParaRPr lang="en-US" sz="1050" dirty="0"/>
           </a:p>
           <a:p>
-            <a:pPr algn="ctr" indent="0" marL="0">
+            <a:pPr marL="0" indent="0" algn="ctr">
               <a:lnSpc>
                 <a:spcPct val="120000"/>
               </a:lnSpc>
@@ -5353,7 +5396,7 @@
             <a:prstDash val="solid"/>
           </a:ln>
           <a:effectLst>
-            <a:outerShdw sx="100000" sy="100000" kx="0" ky="0" algn="bl" rotWithShape="0" blurRad="101600" dist="38100" dir="8100000">
+            <a:outerShdw blurRad="101600" dist="38100" dir="8100000" algn="bl" rotWithShape="0">
               <a:srgbClr val="000000">
                 <a:alpha val="18000"/>
               </a:srgbClr>
@@ -5382,7 +5425,7 @@
           <a:bodyPr wrap="square" lIns="0" tIns="0" rIns="0" bIns="0" rtlCol="0" anchor="ctr"/>
           <a:lstStyle/>
           <a:p>
-            <a:pPr algn="ctr" indent="0" marL="0">
+            <a:pPr marL="0" indent="0" algn="ctr">
               <a:buNone/>
             </a:pPr>
             <a:r>
@@ -5421,7 +5464,7 @@
           <a:bodyPr wrap="square" lIns="0" tIns="0" rIns="0" bIns="0" rtlCol="0" anchor="ctr"/>
           <a:lstStyle/>
           <a:p>
-            <a:pPr algn="ctr" indent="0" marL="0">
+            <a:pPr marL="0" indent="0" algn="ctr">
               <a:lnSpc>
                 <a:spcPct val="120000"/>
               </a:lnSpc>
@@ -5441,7 +5484,7 @@
             <a:endParaRPr lang="en-US" sz="1000" dirty="0"/>
           </a:p>
           <a:p>
-            <a:pPr algn="ctr" indent="0" marL="0">
+            <a:pPr marL="0" indent="0" algn="ctr">
               <a:lnSpc>
                 <a:spcPct val="120000"/>
               </a:lnSpc>
@@ -5486,7 +5529,7 @@
             <a:prstDash val="solid"/>
           </a:ln>
           <a:effectLst>
-            <a:outerShdw sx="100000" sy="100000" kx="0" ky="0" algn="bl" rotWithShape="0" blurRad="101600" dist="38100" dir="8100000">
+            <a:outerShdw blurRad="101600" dist="38100" dir="8100000" algn="bl" rotWithShape="0">
               <a:srgbClr val="000000">
                 <a:alpha val="18000"/>
               </a:srgbClr>
@@ -5515,7 +5558,7 @@
           <a:bodyPr wrap="square" lIns="0" tIns="0" rIns="0" bIns="0" rtlCol="0" anchor="ctr"/>
           <a:lstStyle/>
           <a:p>
-            <a:pPr algn="ctr" indent="0" marL="0">
+            <a:pPr marL="0" indent="0" algn="ctr">
               <a:buNone/>
             </a:pPr>
             <a:r>
@@ -5554,7 +5597,7 @@
           <a:bodyPr wrap="square" lIns="0" tIns="0" rIns="0" bIns="0" rtlCol="0" anchor="ctr"/>
           <a:lstStyle/>
           <a:p>
-            <a:pPr algn="ctr" indent="0" marL="0">
+            <a:pPr marL="0" indent="0" algn="ctr">
               <a:lnSpc>
                 <a:spcPct val="120000"/>
               </a:lnSpc>
@@ -5574,7 +5617,7 @@
             <a:endParaRPr lang="en-US" sz="1000" dirty="0"/>
           </a:p>
           <a:p>
-            <a:pPr algn="ctr" indent="0" marL="0">
+            <a:pPr marL="0" indent="0" algn="ctr">
               <a:lnSpc>
                 <a:spcPct val="120000"/>
               </a:lnSpc>
@@ -5619,7 +5662,7 @@
             <a:prstDash val="solid"/>
           </a:ln>
           <a:effectLst>
-            <a:outerShdw sx="100000" sy="100000" kx="0" ky="0" algn="bl" rotWithShape="0" blurRad="101600" dist="38100" dir="8100000">
+            <a:outerShdw blurRad="101600" dist="38100" dir="8100000" algn="bl" rotWithShape="0">
               <a:srgbClr val="000000">
                 <a:alpha val="18000"/>
               </a:srgbClr>
@@ -5648,7 +5691,7 @@
           <a:bodyPr wrap="square" lIns="0" tIns="0" rIns="0" bIns="0" rtlCol="0" anchor="ctr"/>
           <a:lstStyle/>
           <a:p>
-            <a:pPr algn="ctr" indent="0" marL="0">
+            <a:pPr marL="0" indent="0" algn="ctr">
               <a:buNone/>
             </a:pPr>
             <a:r>
@@ -5687,7 +5730,7 @@
           <a:bodyPr wrap="square" lIns="0" tIns="0" rIns="0" bIns="0" rtlCol="0" anchor="ctr"/>
           <a:lstStyle/>
           <a:p>
-            <a:pPr algn="ctr" indent="0" marL="0">
+            <a:pPr marL="0" indent="0" algn="ctr">
               <a:lnSpc>
                 <a:spcPct val="120000"/>
               </a:lnSpc>
@@ -5707,7 +5750,7 @@
             <a:endParaRPr lang="en-US" sz="1000" dirty="0"/>
           </a:p>
           <a:p>
-            <a:pPr algn="ctr" indent="0" marL="0">
+            <a:pPr marL="0" indent="0" algn="ctr">
               <a:lnSpc>
                 <a:spcPct val="120000"/>
               </a:lnSpc>
@@ -5752,7 +5795,7 @@
             <a:prstDash val="solid"/>
           </a:ln>
           <a:effectLst>
-            <a:outerShdw sx="100000" sy="100000" kx="0" ky="0" algn="bl" rotWithShape="0" blurRad="101600" dist="38100" dir="8100000">
+            <a:outerShdw blurRad="101600" dist="38100" dir="8100000" algn="bl" rotWithShape="0">
               <a:srgbClr val="000000">
                 <a:alpha val="18000"/>
               </a:srgbClr>
@@ -5781,7 +5824,7 @@
           <a:bodyPr wrap="square" lIns="0" tIns="0" rIns="0" bIns="0" rtlCol="0" anchor="ctr"/>
           <a:lstStyle/>
           <a:p>
-            <a:pPr algn="ctr" indent="0" marL="0">
+            <a:pPr marL="0" indent="0" algn="ctr">
               <a:buNone/>
             </a:pPr>
             <a:r>
@@ -5820,7 +5863,7 @@
           <a:bodyPr wrap="square" lIns="0" tIns="0" rIns="0" bIns="0" rtlCol="0" anchor="ctr"/>
           <a:lstStyle/>
           <a:p>
-            <a:pPr algn="ctr" indent="0" marL="0">
+            <a:pPr marL="0" indent="0" algn="ctr">
               <a:lnSpc>
                 <a:spcPct val="120000"/>
               </a:lnSpc>
@@ -5840,7 +5883,7 @@
             <a:endParaRPr lang="en-US" sz="1000" dirty="0"/>
           </a:p>
           <a:p>
-            <a:pPr algn="ctr" indent="0" marL="0">
+            <a:pPr marL="0" indent="0" algn="ctr">
               <a:lnSpc>
                 <a:spcPct val="120000"/>
               </a:lnSpc>
@@ -5882,7 +5925,7 @@
           <a:bodyPr wrap="square" lIns="0" tIns="0" rIns="0" bIns="0" rtlCol="0" anchor="ctr"/>
           <a:lstStyle/>
           <a:p>
-            <a:pPr algn="ctr" indent="0" marL="0">
+            <a:pPr marL="0" indent="0" algn="ctr">
               <a:buNone/>
             </a:pPr>
             <a:r>
@@ -5916,6 +5959,7 @@
         <a:solidFill>
           <a:srgbClr val="F2EFE5"/>
         </a:solidFill>
+        <a:effectLst/>
       </p:bgPr>
     </p:bg>
     <p:spTree>
@@ -5978,11 +6022,11 @@
           <a:bodyPr wrap="square" lIns="0" tIns="0" rIns="0" bIns="0" rtlCol="0" anchor="ctr"/>
           <a:lstStyle/>
           <a:p>
-            <a:pPr indent="0" marL="0">
-              <a:buNone/>
-            </a:pPr>
-            <a:r>
-              <a:rPr lang="en-US" sz="900" b="1" spc="300" kern="0" dirty="0">
+            <a:pPr marL="0" indent="0">
+              <a:buNone/>
+            </a:pPr>
+            <a:r>
+              <a:rPr lang="en-US" sz="900" b="1" kern="0" spc="300" dirty="0">
                 <a:solidFill>
                   <a:srgbClr val="97BC62"/>
                 </a:solidFill>
@@ -6017,7 +6061,7 @@
           <a:bodyPr wrap="square" lIns="0" tIns="0" rIns="0" bIns="0" rtlCol="0" anchor="ctr"/>
           <a:lstStyle/>
           <a:p>
-            <a:pPr indent="0" marL="0">
+            <a:pPr marL="0" indent="0">
               <a:lnSpc>
                 <a:spcPct val="115000"/>
               </a:lnSpc>
@@ -6037,7 +6081,7 @@
             <a:endParaRPr lang="en-US" sz="2200" dirty="0"/>
           </a:p>
           <a:p>
-            <a:pPr indent="0" marL="0">
+            <a:pPr marL="0" indent="0">
               <a:lnSpc>
                 <a:spcPct val="115000"/>
               </a:lnSpc>
@@ -6082,7 +6126,7 @@
             <a:prstDash val="solid"/>
           </a:ln>
           <a:effectLst>
-            <a:outerShdw sx="100000" sy="100000" kx="0" ky="0" algn="bl" rotWithShape="0" blurRad="101600" dist="38100" dir="8100000">
+            <a:outerShdw blurRad="101600" dist="38100" dir="8100000" algn="bl" rotWithShape="0">
               <a:srgbClr val="000000">
                 <a:alpha val="18000"/>
               </a:srgbClr>
@@ -6111,7 +6155,7 @@
           <a:bodyPr wrap="square" lIns="0" tIns="0" rIns="0" bIns="0" rtlCol="0" anchor="ctr"/>
           <a:lstStyle/>
           <a:p>
-            <a:pPr indent="0" marL="0">
+            <a:pPr marL="0" indent="0">
               <a:buNone/>
             </a:pPr>
             <a:r>
@@ -6243,14 +6287,14 @@
       </p:sp>
       <p:pic>
         <p:nvPicPr>
-          <p:cNvPr id="8" name="Image 0" descr="preencoded.png">    </p:cNvPr>
+          <p:cNvPr id="8" name="Image 0" descr="preencoded.png"/>
           <p:cNvPicPr>
             <a:picLocks noChangeAspect="1"/>
           </p:cNvPicPr>
           <p:nvPr/>
         </p:nvPicPr>
         <p:blipFill>
-          <a:blip r:embed="rId1">
+          <a:blip r:embed="rId3">
             <a:alphaModFix amt="70000"/>
           </a:blip>
           <a:stretch>
@@ -6269,217 +6313,7 @@
       </p:pic>
       <p:pic>
         <p:nvPicPr>
-          <p:cNvPr id="9" name="Image 1" descr="preencoded.png">    </p:cNvPr>
-          <p:cNvPicPr>
-            <a:picLocks noChangeAspect="1"/>
-          </p:cNvPicPr>
-          <p:nvPr/>
-        </p:nvPicPr>
-        <p:blipFill>
-          <a:blip r:embed="rId2"/>
-          <a:stretch>
-            <a:fillRect/>
-          </a:stretch>
-        </p:blipFill>
-        <p:spPr>
-          <a:xfrm>
-            <a:off x="347472" y="1581912"/>
-            <a:ext cx="365760" cy="365760"/>
-          </a:xfrm>
-          <a:prstGeom prst="rect">
-            <a:avLst/>
-          </a:prstGeom>
-        </p:spPr>
-      </p:pic>
-      <p:sp>
-        <p:nvSpPr>
-          <p:cNvPr id="10" name="Text 6"/>
-          <p:cNvSpPr/>
-          <p:nvPr/>
-        </p:nvSpPr>
-        <p:spPr>
-          <a:xfrm>
-            <a:off x="804672" y="1536192"/>
-            <a:ext cx="4480560" cy="384048"/>
-          </a:xfrm>
-          <a:prstGeom prst="rect">
-            <a:avLst/>
-          </a:prstGeom>
-          <a:noFill/>
-          <a:ln/>
-        </p:spPr>
-        <p:txBody>
-          <a:bodyPr wrap="square" lIns="0" tIns="0" rIns="0" bIns="0" rtlCol="0" anchor="ctr"/>
-          <a:lstStyle/>
-          <a:p>
-            <a:pPr indent="0" marL="0">
-              <a:buNone/>
-            </a:pPr>
-            <a:r>
-              <a:rPr lang="en-US" sz="1400" b="1" dirty="0">
-                <a:solidFill>
-                  <a:srgbClr val="2E2E2E"/>
-                </a:solidFill>
-                <a:latin typeface="Georgia" pitchFamily="34" charset="0"/>
-                <a:ea typeface="Georgia" pitchFamily="34" charset="-122"/>
-                <a:cs typeface="Georgia" pitchFamily="34" charset="-120"/>
-              </a:rPr>
-              <a:t>Carbon revenue funds everything</a:t>
-            </a:r>
-            <a:endParaRPr lang="en-US" sz="1400" dirty="0"/>
-          </a:p>
-        </p:txBody>
-      </p:sp>
-      <p:sp>
-        <p:nvSpPr>
-          <p:cNvPr id="11" name="Text 7"/>
-          <p:cNvSpPr/>
-          <p:nvPr/>
-        </p:nvSpPr>
-        <p:spPr>
-          <a:xfrm>
-            <a:off x="804672" y="1920240"/>
-            <a:ext cx="4480560" cy="566928"/>
-          </a:xfrm>
-          <a:prstGeom prst="rect">
-            <a:avLst/>
-          </a:prstGeom>
-          <a:noFill/>
-          <a:ln/>
-        </p:spPr>
-        <p:txBody>
-          <a:bodyPr wrap="square" lIns="0" tIns="0" rIns="0" bIns="0" rtlCol="0" anchor="ctr"/>
-          <a:lstStyle/>
-          <a:p>
-            <a:pPr indent="0" marL="0">
-              <a:lnSpc>
-                <a:spcPct val="125000"/>
-              </a:lnSpc>
-              <a:buNone/>
-            </a:pPr>
-            <a:r>
-              <a:rPr lang="en-US" sz="1150" dirty="0">
-                <a:solidFill>
-                  <a:srgbClr val="555555"/>
-                </a:solidFill>
-                <a:latin typeface="Calibri" pitchFamily="34" charset="0"/>
-                <a:ea typeface="Calibri" pitchFamily="34" charset="-122"/>
-                <a:cs typeface="Calibri" pitchFamily="34" charset="-120"/>
-              </a:rPr>
-              <a:t>3,660 t CO₂e removed per year per hub generates ~$724K CAD in credits alone.</a:t>
-            </a:r>
-            <a:endParaRPr lang="en-US" sz="1150" dirty="0"/>
-          </a:p>
-        </p:txBody>
-      </p:sp>
-      <p:pic>
-        <p:nvPicPr>
-          <p:cNvPr id="12" name="Image 2" descr="preencoded.png">    </p:cNvPr>
-          <p:cNvPicPr>
-            <a:picLocks noChangeAspect="1"/>
-          </p:cNvPicPr>
-          <p:nvPr/>
-        </p:nvPicPr>
-        <p:blipFill>
-          <a:blip r:embed="rId3"/>
-          <a:stretch>
-            <a:fillRect/>
-          </a:stretch>
-        </p:blipFill>
-        <p:spPr>
-          <a:xfrm>
-            <a:off x="347472" y="2724912"/>
-            <a:ext cx="365760" cy="365760"/>
-          </a:xfrm>
-          <a:prstGeom prst="rect">
-            <a:avLst/>
-          </a:prstGeom>
-        </p:spPr>
-      </p:pic>
-      <p:sp>
-        <p:nvSpPr>
-          <p:cNvPr id="13" name="Text 8"/>
-          <p:cNvSpPr/>
-          <p:nvPr/>
-        </p:nvSpPr>
-        <p:spPr>
-          <a:xfrm>
-            <a:off x="804672" y="2679192"/>
-            <a:ext cx="4480560" cy="384048"/>
-          </a:xfrm>
-          <a:prstGeom prst="rect">
-            <a:avLst/>
-          </a:prstGeom>
-          <a:noFill/>
-          <a:ln/>
-        </p:spPr>
-        <p:txBody>
-          <a:bodyPr wrap="square" lIns="0" tIns="0" rIns="0" bIns="0" rtlCol="0" anchor="ctr"/>
-          <a:lstStyle/>
-          <a:p>
-            <a:pPr indent="0" marL="0">
-              <a:buNone/>
-            </a:pPr>
-            <a:r>
-              <a:rPr lang="en-US" sz="1400" b="1" dirty="0">
-                <a:solidFill>
-                  <a:srgbClr val="2E2E2E"/>
-                </a:solidFill>
-                <a:latin typeface="Georgia" pitchFamily="34" charset="0"/>
-                <a:ea typeface="Georgia" pitchFamily="34" charset="-122"/>
-                <a:cs typeface="Georgia" pitchFamily="34" charset="-120"/>
-              </a:rPr>
-              <a:t>Food is a public good</a:t>
-            </a:r>
-            <a:endParaRPr lang="en-US" sz="1400" dirty="0"/>
-          </a:p>
-        </p:txBody>
-      </p:sp>
-      <p:sp>
-        <p:nvSpPr>
-          <p:cNvPr id="14" name="Text 9"/>
-          <p:cNvSpPr/>
-          <p:nvPr/>
-        </p:nvSpPr>
-        <p:spPr>
-          <a:xfrm>
-            <a:off x="804672" y="3063240"/>
-            <a:ext cx="4480560" cy="566928"/>
-          </a:xfrm>
-          <a:prstGeom prst="rect">
-            <a:avLst/>
-          </a:prstGeom>
-          <a:noFill/>
-          <a:ln/>
-        </p:spPr>
-        <p:txBody>
-          <a:bodyPr wrap="square" lIns="0" tIns="0" rIns="0" bIns="0" rtlCol="0" anchor="ctr"/>
-          <a:lstStyle/>
-          <a:p>
-            <a:pPr indent="0" marL="0">
-              <a:lnSpc>
-                <a:spcPct val="125000"/>
-              </a:lnSpc>
-              <a:buNone/>
-            </a:pPr>
-            <a:r>
-              <a:rPr lang="en-US" sz="1150" dirty="0">
-                <a:solidFill>
-                  <a:srgbClr val="555555"/>
-                </a:solidFill>
-                <a:latin typeface="Calibri" pitchFamily="34" charset="0"/>
-                <a:ea typeface="Calibri" pitchFamily="34" charset="-122"/>
-                <a:cs typeface="Calibri" pitchFamily="34" charset="-120"/>
-              </a:rPr>
-              <a:t>Pick-your-own abundance worth $1.5–2.5M retail per hub. Zero harvest cost.</a:t>
-            </a:r>
-            <a:endParaRPr lang="en-US" sz="1150" dirty="0"/>
-          </a:p>
-        </p:txBody>
-      </p:sp>
-      <p:pic>
-        <p:nvPicPr>
-          <p:cNvPr id="15" name="Image 3" descr="preencoded.png">    </p:cNvPr>
+          <p:cNvPr id="9" name="Image 1" descr="preencoded.png"/>
           <p:cNvPicPr>
             <a:picLocks noChangeAspect="1"/>
           </p:cNvPicPr>
@@ -6493,7 +6327,7 @@
         </p:blipFill>
         <p:spPr>
           <a:xfrm>
-            <a:off x="347472" y="3867912"/>
+            <a:off x="347472" y="1581912"/>
             <a:ext cx="365760" cy="365760"/>
           </a:xfrm>
           <a:prstGeom prst="rect">
@@ -6503,13 +6337,13 @@
       </p:pic>
       <p:sp>
         <p:nvSpPr>
-          <p:cNvPr id="16" name="Text 10"/>
-          <p:cNvSpPr/>
-          <p:nvPr/>
-        </p:nvSpPr>
-        <p:spPr>
-          <a:xfrm>
-            <a:off x="804672" y="3822192"/>
+          <p:cNvPr id="10" name="Text 6"/>
+          <p:cNvSpPr/>
+          <p:nvPr/>
+        </p:nvSpPr>
+        <p:spPr>
+          <a:xfrm>
+            <a:off x="804672" y="1536192"/>
             <a:ext cx="4480560" cy="384048"/>
           </a:xfrm>
           <a:prstGeom prst="rect">
@@ -6522,7 +6356,7 @@
           <a:bodyPr wrap="square" lIns="0" tIns="0" rIns="0" bIns="0" rtlCol="0" anchor="ctr"/>
           <a:lstStyle/>
           <a:p>
-            <a:pPr indent="0" marL="0">
+            <a:pPr marL="0" indent="0">
               <a:buNone/>
             </a:pPr>
             <a:r>
@@ -6534,6 +6368,216 @@
                 <a:ea typeface="Georgia" pitchFamily="34" charset="-122"/>
                 <a:cs typeface="Georgia" pitchFamily="34" charset="-120"/>
               </a:rPr>
+              <a:t>Carbon revenue funds everything</a:t>
+            </a:r>
+            <a:endParaRPr lang="en-US" sz="1400" dirty="0"/>
+          </a:p>
+        </p:txBody>
+      </p:sp>
+      <p:sp>
+        <p:nvSpPr>
+          <p:cNvPr id="11" name="Text 7"/>
+          <p:cNvSpPr/>
+          <p:nvPr/>
+        </p:nvSpPr>
+        <p:spPr>
+          <a:xfrm>
+            <a:off x="804672" y="1920240"/>
+            <a:ext cx="4480560" cy="566928"/>
+          </a:xfrm>
+          <a:prstGeom prst="rect">
+            <a:avLst/>
+          </a:prstGeom>
+          <a:noFill/>
+          <a:ln/>
+        </p:spPr>
+        <p:txBody>
+          <a:bodyPr wrap="square" lIns="0" tIns="0" rIns="0" bIns="0" rtlCol="0" anchor="ctr"/>
+          <a:lstStyle/>
+          <a:p>
+            <a:pPr marL="0" indent="0">
+              <a:lnSpc>
+                <a:spcPct val="125000"/>
+              </a:lnSpc>
+              <a:buNone/>
+            </a:pPr>
+            <a:r>
+              <a:rPr lang="en-US" sz="1150" dirty="0">
+                <a:solidFill>
+                  <a:srgbClr val="555555"/>
+                </a:solidFill>
+                <a:latin typeface="Calibri" pitchFamily="34" charset="0"/>
+                <a:ea typeface="Calibri" pitchFamily="34" charset="-122"/>
+                <a:cs typeface="Calibri" pitchFamily="34" charset="-120"/>
+              </a:rPr>
+              <a:t>3,660 t CO₂e removed per year per hub generates ~$724K CAD in credits alone.</a:t>
+            </a:r>
+            <a:endParaRPr lang="en-US" sz="1150" dirty="0"/>
+          </a:p>
+        </p:txBody>
+      </p:sp>
+      <p:pic>
+        <p:nvPicPr>
+          <p:cNvPr id="12" name="Image 2" descr="preencoded.png"/>
+          <p:cNvPicPr>
+            <a:picLocks noChangeAspect="1"/>
+          </p:cNvPicPr>
+          <p:nvPr/>
+        </p:nvPicPr>
+        <p:blipFill>
+          <a:blip r:embed="rId5"/>
+          <a:stretch>
+            <a:fillRect/>
+          </a:stretch>
+        </p:blipFill>
+        <p:spPr>
+          <a:xfrm>
+            <a:off x="347472" y="2724912"/>
+            <a:ext cx="365760" cy="365760"/>
+          </a:xfrm>
+          <a:prstGeom prst="rect">
+            <a:avLst/>
+          </a:prstGeom>
+        </p:spPr>
+      </p:pic>
+      <p:sp>
+        <p:nvSpPr>
+          <p:cNvPr id="13" name="Text 8"/>
+          <p:cNvSpPr/>
+          <p:nvPr/>
+        </p:nvSpPr>
+        <p:spPr>
+          <a:xfrm>
+            <a:off x="804672" y="2679192"/>
+            <a:ext cx="4480560" cy="384048"/>
+          </a:xfrm>
+          <a:prstGeom prst="rect">
+            <a:avLst/>
+          </a:prstGeom>
+          <a:noFill/>
+          <a:ln/>
+        </p:spPr>
+        <p:txBody>
+          <a:bodyPr wrap="square" lIns="0" tIns="0" rIns="0" bIns="0" rtlCol="0" anchor="ctr"/>
+          <a:lstStyle/>
+          <a:p>
+            <a:pPr marL="0" indent="0">
+              <a:buNone/>
+            </a:pPr>
+            <a:r>
+              <a:rPr lang="en-US" sz="1400" b="1" dirty="0">
+                <a:solidFill>
+                  <a:srgbClr val="2E2E2E"/>
+                </a:solidFill>
+                <a:latin typeface="Georgia" pitchFamily="34" charset="0"/>
+                <a:ea typeface="Georgia" pitchFamily="34" charset="-122"/>
+                <a:cs typeface="Georgia" pitchFamily="34" charset="-120"/>
+              </a:rPr>
+              <a:t>Food is a public good</a:t>
+            </a:r>
+            <a:endParaRPr lang="en-US" sz="1400" dirty="0"/>
+          </a:p>
+        </p:txBody>
+      </p:sp>
+      <p:sp>
+        <p:nvSpPr>
+          <p:cNvPr id="14" name="Text 9"/>
+          <p:cNvSpPr/>
+          <p:nvPr/>
+        </p:nvSpPr>
+        <p:spPr>
+          <a:xfrm>
+            <a:off x="804672" y="3063240"/>
+            <a:ext cx="4480560" cy="566928"/>
+          </a:xfrm>
+          <a:prstGeom prst="rect">
+            <a:avLst/>
+          </a:prstGeom>
+          <a:noFill/>
+          <a:ln/>
+        </p:spPr>
+        <p:txBody>
+          <a:bodyPr wrap="square" lIns="0" tIns="0" rIns="0" bIns="0" rtlCol="0" anchor="ctr"/>
+          <a:lstStyle/>
+          <a:p>
+            <a:pPr marL="0" indent="0">
+              <a:lnSpc>
+                <a:spcPct val="125000"/>
+              </a:lnSpc>
+              <a:buNone/>
+            </a:pPr>
+            <a:r>
+              <a:rPr lang="en-US" sz="1150" dirty="0">
+                <a:solidFill>
+                  <a:srgbClr val="555555"/>
+                </a:solidFill>
+                <a:latin typeface="Calibri" pitchFamily="34" charset="0"/>
+                <a:ea typeface="Calibri" pitchFamily="34" charset="-122"/>
+                <a:cs typeface="Calibri" pitchFamily="34" charset="-120"/>
+              </a:rPr>
+              <a:t>Pick-your-own abundance worth $1.5–2.5M retail per hub. Zero harvest cost.</a:t>
+            </a:r>
+            <a:endParaRPr lang="en-US" sz="1150" dirty="0"/>
+          </a:p>
+        </p:txBody>
+      </p:sp>
+      <p:pic>
+        <p:nvPicPr>
+          <p:cNvPr id="15" name="Image 3" descr="preencoded.png"/>
+          <p:cNvPicPr>
+            <a:picLocks noChangeAspect="1"/>
+          </p:cNvPicPr>
+          <p:nvPr/>
+        </p:nvPicPr>
+        <p:blipFill>
+          <a:blip r:embed="rId6"/>
+          <a:stretch>
+            <a:fillRect/>
+          </a:stretch>
+        </p:blipFill>
+        <p:spPr>
+          <a:xfrm>
+            <a:off x="347472" y="3867912"/>
+            <a:ext cx="365760" cy="365760"/>
+          </a:xfrm>
+          <a:prstGeom prst="rect">
+            <a:avLst/>
+          </a:prstGeom>
+        </p:spPr>
+      </p:pic>
+      <p:sp>
+        <p:nvSpPr>
+          <p:cNvPr id="16" name="Text 10"/>
+          <p:cNvSpPr/>
+          <p:nvPr/>
+        </p:nvSpPr>
+        <p:spPr>
+          <a:xfrm>
+            <a:off x="804672" y="3822192"/>
+            <a:ext cx="4480560" cy="384048"/>
+          </a:xfrm>
+          <a:prstGeom prst="rect">
+            <a:avLst/>
+          </a:prstGeom>
+          <a:noFill/>
+          <a:ln/>
+        </p:spPr>
+        <p:txBody>
+          <a:bodyPr wrap="square" lIns="0" tIns="0" rIns="0" bIns="0" rtlCol="0" anchor="ctr"/>
+          <a:lstStyle/>
+          <a:p>
+            <a:pPr marL="0" indent="0">
+              <a:buNone/>
+            </a:pPr>
+            <a:r>
+              <a:rPr lang="en-US" sz="1400" b="1" dirty="0">
+                <a:solidFill>
+                  <a:srgbClr val="2E2E2E"/>
+                </a:solidFill>
+                <a:latin typeface="Georgia" pitchFamily="34" charset="0"/>
+                <a:ea typeface="Georgia" pitchFamily="34" charset="-122"/>
+                <a:cs typeface="Georgia" pitchFamily="34" charset="-120"/>
+              </a:rPr>
               <a:t>Self-replicating by design</a:t>
             </a:r>
             <a:endParaRPr lang="en-US" sz="1400" dirty="0"/>
@@ -6561,7 +6605,7 @@
           <a:bodyPr wrap="square" lIns="0" tIns="0" rIns="0" bIns="0" rtlCol="0" anchor="ctr"/>
           <a:lstStyle/>
           <a:p>
-            <a:pPr indent="0" marL="0">
+            <a:pPr marL="0" indent="0">
               <a:lnSpc>
                 <a:spcPct val="125000"/>
               </a:lnSpc>
@@ -6598,6 +6642,7 @@
         <a:solidFill>
           <a:srgbClr val="F2EFE5"/>
         </a:solidFill>
+        <a:effectLst/>
       </p:bgPr>
     </p:bg>
     <p:spTree>
@@ -6660,11 +6705,11 @@
           <a:bodyPr wrap="square" lIns="0" tIns="0" rIns="0" bIns="0" rtlCol="0" anchor="ctr"/>
           <a:lstStyle/>
           <a:p>
-            <a:pPr indent="0" marL="0">
-              <a:buNone/>
-            </a:pPr>
-            <a:r>
-              <a:rPr lang="en-US" sz="900" b="1" spc="300" kern="0" dirty="0">
+            <a:pPr marL="0" indent="0">
+              <a:buNone/>
+            </a:pPr>
+            <a:r>
+              <a:rPr lang="en-US" sz="900" b="1" kern="0" spc="300" dirty="0">
                 <a:solidFill>
                   <a:srgbClr val="97BC62"/>
                 </a:solidFill>
@@ -6699,7 +6744,7 @@
           <a:bodyPr wrap="square" lIns="0" tIns="0" rIns="0" bIns="0" rtlCol="0" anchor="ctr"/>
           <a:lstStyle/>
           <a:p>
-            <a:pPr indent="0" marL="0">
+            <a:pPr marL="0" indent="0">
               <a:buNone/>
             </a:pPr>
             <a:r>
@@ -6763,7 +6808,7 @@
           <a:bodyPr wrap="square" lIns="0" tIns="0" rIns="0" bIns="0" rtlCol="0" anchor="ctr"/>
           <a:lstStyle/>
           <a:p>
-            <a:pPr indent="0" marL="0">
+            <a:pPr marL="0" indent="0">
               <a:lnSpc>
                 <a:spcPct val="110000"/>
               </a:lnSpc>
@@ -6830,7 +6875,7 @@
           <a:bodyPr wrap="square" lIns="0" tIns="0" rIns="0" bIns="0" rtlCol="0" anchor="ctr"/>
           <a:lstStyle/>
           <a:p>
-            <a:pPr indent="0" marL="0">
+            <a:pPr marL="0" indent="0">
               <a:lnSpc>
                 <a:spcPct val="110000"/>
               </a:lnSpc>
@@ -6897,7 +6942,7 @@
           <a:bodyPr wrap="square" lIns="0" tIns="0" rIns="0" bIns="0" rtlCol="0" anchor="ctr"/>
           <a:lstStyle/>
           <a:p>
-            <a:pPr indent="0" marL="0">
+            <a:pPr marL="0" indent="0">
               <a:lnSpc>
                 <a:spcPct val="110000"/>
               </a:lnSpc>
@@ -6917,7 +6962,7 @@
             <a:endParaRPr lang="en-US" sz="1100" dirty="0"/>
           </a:p>
           <a:p>
-            <a:pPr indent="0" marL="0">
+            <a:pPr marL="0" indent="0">
               <a:lnSpc>
                 <a:spcPct val="110000"/>
               </a:lnSpc>
@@ -6984,7 +7029,7 @@
           <a:bodyPr wrap="square" lIns="0" tIns="0" rIns="0" bIns="0" rtlCol="0" anchor="ctr"/>
           <a:lstStyle/>
           <a:p>
-            <a:pPr indent="0" marL="0">
+            <a:pPr marL="0" indent="0">
               <a:lnSpc>
                 <a:spcPct val="110000"/>
               </a:lnSpc>
@@ -7076,7 +7121,7 @@
           <a:bodyPr wrap="square" lIns="0" tIns="0" rIns="0" bIns="0" rtlCol="0" anchor="ctr"/>
           <a:lstStyle/>
           <a:p>
-            <a:pPr indent="0" marL="0">
+            <a:pPr marL="0" indent="0">
               <a:lnSpc>
                 <a:spcPct val="120000"/>
               </a:lnSpc>
@@ -7143,7 +7188,7 @@
           <a:bodyPr wrap="square" lIns="0" tIns="0" rIns="0" bIns="0" rtlCol="0" anchor="ctr"/>
           <a:lstStyle/>
           <a:p>
-            <a:pPr indent="0" marL="0">
+            <a:pPr marL="0" indent="0">
               <a:lnSpc>
                 <a:spcPct val="120000"/>
               </a:lnSpc>
@@ -7210,7 +7255,7 @@
           <a:bodyPr wrap="square" lIns="0" tIns="0" rIns="0" bIns="0" rtlCol="0" anchor="ctr"/>
           <a:lstStyle/>
           <a:p>
-            <a:pPr indent="0" marL="0">
+            <a:pPr marL="0" indent="0">
               <a:lnSpc>
                 <a:spcPct val="120000"/>
               </a:lnSpc>
@@ -7277,7 +7322,7 @@
           <a:bodyPr wrap="square" lIns="0" tIns="0" rIns="0" bIns="0" rtlCol="0" anchor="ctr"/>
           <a:lstStyle/>
           <a:p>
-            <a:pPr indent="0" marL="0">
+            <a:pPr marL="0" indent="0">
               <a:lnSpc>
                 <a:spcPct val="120000"/>
               </a:lnSpc>
@@ -7369,7 +7414,7 @@
           <a:bodyPr wrap="square" lIns="0" tIns="0" rIns="0" bIns="0" rtlCol="0" anchor="ctr"/>
           <a:lstStyle/>
           <a:p>
-            <a:pPr indent="0" marL="0">
+            <a:pPr marL="0" indent="0">
               <a:lnSpc>
                 <a:spcPct val="120000"/>
               </a:lnSpc>
@@ -7436,7 +7481,7 @@
           <a:bodyPr wrap="square" lIns="0" tIns="0" rIns="0" bIns="0" rtlCol="0" anchor="ctr"/>
           <a:lstStyle/>
           <a:p>
-            <a:pPr indent="0" marL="0">
+            <a:pPr marL="0" indent="0">
               <a:lnSpc>
                 <a:spcPct val="120000"/>
               </a:lnSpc>
@@ -7503,7 +7548,7 @@
           <a:bodyPr wrap="square" lIns="0" tIns="0" rIns="0" bIns="0" rtlCol="0" anchor="ctr"/>
           <a:lstStyle/>
           <a:p>
-            <a:pPr indent="0" marL="0">
+            <a:pPr marL="0" indent="0">
               <a:lnSpc>
                 <a:spcPct val="120000"/>
               </a:lnSpc>
@@ -7570,7 +7615,7 @@
           <a:bodyPr wrap="square" lIns="0" tIns="0" rIns="0" bIns="0" rtlCol="0" anchor="ctr"/>
           <a:lstStyle/>
           <a:p>
-            <a:pPr indent="0" marL="0">
+            <a:pPr marL="0" indent="0">
               <a:lnSpc>
                 <a:spcPct val="120000"/>
               </a:lnSpc>
@@ -7662,7 +7707,7 @@
           <a:bodyPr wrap="square" lIns="0" tIns="0" rIns="0" bIns="0" rtlCol="0" anchor="ctr"/>
           <a:lstStyle/>
           <a:p>
-            <a:pPr indent="0" marL="0">
+            <a:pPr marL="0" indent="0">
               <a:lnSpc>
                 <a:spcPct val="120000"/>
               </a:lnSpc>
@@ -7729,7 +7774,7 @@
           <a:bodyPr wrap="square" lIns="0" tIns="0" rIns="0" bIns="0" rtlCol="0" anchor="ctr"/>
           <a:lstStyle/>
           <a:p>
-            <a:pPr indent="0" marL="0">
+            <a:pPr marL="0" indent="0">
               <a:lnSpc>
                 <a:spcPct val="120000"/>
               </a:lnSpc>
@@ -7796,7 +7841,7 @@
           <a:bodyPr wrap="square" lIns="0" tIns="0" rIns="0" bIns="0" rtlCol="0" anchor="ctr"/>
           <a:lstStyle/>
           <a:p>
-            <a:pPr indent="0" marL="0">
+            <a:pPr marL="0" indent="0">
               <a:lnSpc>
                 <a:spcPct val="120000"/>
               </a:lnSpc>
@@ -7863,7 +7908,7 @@
           <a:bodyPr wrap="square" lIns="0" tIns="0" rIns="0" bIns="0" rtlCol="0" anchor="ctr"/>
           <a:lstStyle/>
           <a:p>
-            <a:pPr indent="0" marL="0">
+            <a:pPr marL="0" indent="0">
               <a:lnSpc>
                 <a:spcPct val="120000"/>
               </a:lnSpc>
@@ -7955,7 +8000,7 @@
           <a:bodyPr wrap="square" lIns="0" tIns="0" rIns="0" bIns="0" rtlCol="0" anchor="ctr"/>
           <a:lstStyle/>
           <a:p>
-            <a:pPr indent="0" marL="0">
+            <a:pPr marL="0" indent="0">
               <a:lnSpc>
                 <a:spcPct val="120000"/>
               </a:lnSpc>
@@ -8022,7 +8067,7 @@
           <a:bodyPr wrap="square" lIns="0" tIns="0" rIns="0" bIns="0" rtlCol="0" anchor="ctr"/>
           <a:lstStyle/>
           <a:p>
-            <a:pPr indent="0" marL="0">
+            <a:pPr marL="0" indent="0">
               <a:lnSpc>
                 <a:spcPct val="120000"/>
               </a:lnSpc>
@@ -8089,7 +8134,7 @@
           <a:bodyPr wrap="square" lIns="0" tIns="0" rIns="0" bIns="0" rtlCol="0" anchor="ctr"/>
           <a:lstStyle/>
           <a:p>
-            <a:pPr indent="0" marL="0">
+            <a:pPr marL="0" indent="0">
               <a:lnSpc>
                 <a:spcPct val="120000"/>
               </a:lnSpc>
@@ -8156,7 +8201,7 @@
           <a:bodyPr wrap="square" lIns="0" tIns="0" rIns="0" bIns="0" rtlCol="0" anchor="ctr"/>
           <a:lstStyle/>
           <a:p>
-            <a:pPr indent="0" marL="0">
+            <a:pPr marL="0" indent="0">
               <a:lnSpc>
                 <a:spcPct val="120000"/>
               </a:lnSpc>
@@ -8198,7 +8243,7 @@
           <a:bodyPr wrap="square" lIns="0" tIns="0" rIns="0" bIns="0" rtlCol="0" anchor="ctr"/>
           <a:lstStyle/>
           <a:p>
-            <a:pPr indent="0" marL="0">
+            <a:pPr marL="0" indent="0">
               <a:buNone/>
             </a:pPr>
             <a:r>
@@ -8232,6 +8277,7 @@
         <a:solidFill>
           <a:srgbClr val="1A2A1A"/>
         </a:solidFill>
+        <a:effectLst/>
       </p:bgPr>
     </p:bg>
     <p:spTree>
@@ -8275,14 +8321,14 @@
       </p:sp>
       <p:pic>
         <p:nvPicPr>
-          <p:cNvPr id="3" name="Image 0" descr="preencoded.png">    </p:cNvPr>
+          <p:cNvPr id="3" name="Image 0" descr="preencoded.png"/>
           <p:cNvPicPr>
             <a:picLocks noChangeAspect="1"/>
           </p:cNvPicPr>
           <p:nvPr/>
         </p:nvPicPr>
         <p:blipFill>
-          <a:blip r:embed="rId1">
+          <a:blip r:embed="rId3">
             <a:alphaModFix amt="20000"/>
           </a:blip>
           <a:stretch>
@@ -8320,11 +8366,11 @@
           <a:bodyPr wrap="square" lIns="0" tIns="0" rIns="0" bIns="0" rtlCol="0" anchor="ctr"/>
           <a:lstStyle/>
           <a:p>
-            <a:pPr indent="0" marL="0">
-              <a:buNone/>
-            </a:pPr>
-            <a:r>
-              <a:rPr lang="en-US" sz="900" b="1" spc="300" kern="0" dirty="0">
+            <a:pPr marL="0" indent="0">
+              <a:buNone/>
+            </a:pPr>
+            <a:r>
+              <a:rPr lang="en-US" sz="900" b="1" kern="0" spc="300" dirty="0">
                 <a:solidFill>
                   <a:srgbClr val="97BC62"/>
                 </a:solidFill>
@@ -8359,7 +8405,7 @@
           <a:bodyPr wrap="square" lIns="0" tIns="0" rIns="0" bIns="0" rtlCol="0" anchor="ctr"/>
           <a:lstStyle/>
           <a:p>
-            <a:pPr indent="0" marL="0">
+            <a:pPr marL="0" indent="0">
               <a:lnSpc>
                 <a:spcPct val="110000"/>
               </a:lnSpc>
@@ -8379,7 +8425,7 @@
             <a:endParaRPr lang="en-US" sz="3400" dirty="0"/>
           </a:p>
           <a:p>
-            <a:pPr indent="0" marL="0">
+            <a:pPr marL="0" indent="0">
               <a:lnSpc>
                 <a:spcPct val="110000"/>
               </a:lnSpc>
@@ -8421,7 +8467,7 @@
           <a:bodyPr wrap="square" lIns="0" tIns="0" rIns="0" bIns="0" rtlCol="0" anchor="ctr"/>
           <a:lstStyle/>
           <a:p>
-            <a:pPr indent="0" marL="0">
+            <a:pPr marL="0" indent="0">
               <a:lnSpc>
                 <a:spcPct val="130000"/>
               </a:lnSpc>
@@ -8466,7 +8512,7 @@
             <a:prstDash val="solid"/>
           </a:ln>
           <a:effectLst>
-            <a:outerShdw sx="100000" sy="100000" kx="0" ky="0" algn="bl" rotWithShape="0" blurRad="101600" dist="38100" dir="8100000">
+            <a:outerShdw blurRad="101600" dist="38100" dir="8100000" algn="bl" rotWithShape="0">
               <a:srgbClr val="000000">
                 <a:alpha val="18000"/>
               </a:srgbClr>
@@ -8520,7 +8566,7 @@
           <a:bodyPr wrap="square" lIns="0" tIns="0" rIns="0" bIns="0" rtlCol="0" anchor="ctr"/>
           <a:lstStyle/>
           <a:p>
-            <a:pPr algn="ctr" indent="0" marL="0">
+            <a:pPr marL="0" indent="0" algn="ctr">
               <a:buNone/>
             </a:pPr>
             <a:r>
@@ -8559,7 +8605,7 @@
           <a:bodyPr wrap="square" lIns="0" tIns="0" rIns="0" bIns="0" rtlCol="0" anchor="ctr"/>
           <a:lstStyle/>
           <a:p>
-            <a:pPr algn="ctr" indent="0" marL="0">
+            <a:pPr marL="0" indent="0" algn="ctr">
               <a:lnSpc>
                 <a:spcPct val="120000"/>
               </a:lnSpc>
@@ -8579,7 +8625,7 @@
             <a:endParaRPr lang="en-US" sz="1100" dirty="0"/>
           </a:p>
           <a:p>
-            <a:pPr algn="ctr" indent="0" marL="0">
+            <a:pPr marL="0" indent="0" algn="ctr">
               <a:lnSpc>
                 <a:spcPct val="120000"/>
               </a:lnSpc>
@@ -8624,7 +8670,7 @@
             <a:prstDash val="solid"/>
           </a:ln>
           <a:effectLst>
-            <a:outerShdw sx="100000" sy="100000" kx="0" ky="0" algn="bl" rotWithShape="0" blurRad="101600" dist="38100" dir="8100000">
+            <a:outerShdw blurRad="101600" dist="38100" dir="8100000" algn="bl" rotWithShape="0">
               <a:srgbClr val="000000">
                 <a:alpha val="18000"/>
               </a:srgbClr>
@@ -8678,7 +8724,7 @@
           <a:bodyPr wrap="square" lIns="0" tIns="0" rIns="0" bIns="0" rtlCol="0" anchor="ctr"/>
           <a:lstStyle/>
           <a:p>
-            <a:pPr algn="ctr" indent="0" marL="0">
+            <a:pPr marL="0" indent="0" algn="ctr">
               <a:buNone/>
             </a:pPr>
             <a:r>
@@ -8717,7 +8763,7 @@
           <a:bodyPr wrap="square" lIns="0" tIns="0" rIns="0" bIns="0" rtlCol="0" anchor="ctr"/>
           <a:lstStyle/>
           <a:p>
-            <a:pPr algn="ctr" indent="0" marL="0">
+            <a:pPr marL="0" indent="0" algn="ctr">
               <a:lnSpc>
                 <a:spcPct val="120000"/>
               </a:lnSpc>
@@ -8737,7 +8783,7 @@
             <a:endParaRPr lang="en-US" sz="1100" dirty="0"/>
           </a:p>
           <a:p>
-            <a:pPr algn="ctr" indent="0" marL="0">
+            <a:pPr marL="0" indent="0" algn="ctr">
               <a:lnSpc>
                 <a:spcPct val="120000"/>
               </a:lnSpc>
@@ -8782,7 +8828,7 @@
             <a:prstDash val="solid"/>
           </a:ln>
           <a:effectLst>
-            <a:outerShdw sx="100000" sy="100000" kx="0" ky="0" algn="bl" rotWithShape="0" blurRad="101600" dist="38100" dir="8100000">
+            <a:outerShdw blurRad="101600" dist="38100" dir="8100000" algn="bl" rotWithShape="0">
               <a:srgbClr val="000000">
                 <a:alpha val="18000"/>
               </a:srgbClr>
@@ -8836,7 +8882,7 @@
           <a:bodyPr wrap="square" lIns="0" tIns="0" rIns="0" bIns="0" rtlCol="0" anchor="ctr"/>
           <a:lstStyle/>
           <a:p>
-            <a:pPr algn="ctr" indent="0" marL="0">
+            <a:pPr marL="0" indent="0" algn="ctr">
               <a:buNone/>
             </a:pPr>
             <a:r>
@@ -8875,7 +8921,7 @@
           <a:bodyPr wrap="square" lIns="0" tIns="0" rIns="0" bIns="0" rtlCol="0" anchor="ctr"/>
           <a:lstStyle/>
           <a:p>
-            <a:pPr algn="ctr" indent="0" marL="0">
+            <a:pPr marL="0" indent="0" algn="ctr">
               <a:lnSpc>
                 <a:spcPct val="120000"/>
               </a:lnSpc>
@@ -8895,7 +8941,7 @@
             <a:endParaRPr lang="en-US" sz="1100" dirty="0"/>
           </a:p>
           <a:p>
-            <a:pPr algn="ctr" indent="0" marL="0">
+            <a:pPr marL="0" indent="0" algn="ctr">
               <a:lnSpc>
                 <a:spcPct val="120000"/>
               </a:lnSpc>
@@ -8937,7 +8983,7 @@
           <a:bodyPr wrap="square" lIns="0" tIns="0" rIns="0" bIns="0" rtlCol="0" anchor="ctr"/>
           <a:lstStyle/>
           <a:p>
-            <a:pPr algn="ctr" indent="0" marL="0">
+            <a:pPr marL="0" indent="0" algn="ctr">
               <a:lnSpc>
                 <a:spcPct val="130000"/>
               </a:lnSpc>
@@ -8974,6 +9020,7 @@
         <a:solidFill>
           <a:srgbClr val="F2EFE5"/>
         </a:solidFill>
+        <a:effectLst/>
       </p:bgPr>
     </p:bg>
     <p:spTree>
@@ -9036,11 +9083,11 @@
           <a:bodyPr wrap="square" lIns="0" tIns="0" rIns="0" bIns="0" rtlCol="0" anchor="ctr"/>
           <a:lstStyle/>
           <a:p>
-            <a:pPr indent="0" marL="0">
-              <a:buNone/>
-            </a:pPr>
-            <a:r>
-              <a:rPr lang="en-US" sz="900" b="1" spc="300" kern="0" dirty="0">
+            <a:pPr marL="0" indent="0">
+              <a:buNone/>
+            </a:pPr>
+            <a:r>
+              <a:rPr lang="en-US" sz="900" b="1" kern="0" spc="300" dirty="0">
                 <a:solidFill>
                   <a:srgbClr val="97BC62"/>
                 </a:solidFill>
@@ -9075,7 +9122,7 @@
           <a:bodyPr wrap="square" lIns="0" tIns="0" rIns="0" bIns="0" rtlCol="0" anchor="ctr"/>
           <a:lstStyle/>
           <a:p>
-            <a:pPr indent="0" marL="0">
+            <a:pPr marL="0" indent="0">
               <a:buNone/>
             </a:pPr>
             <a:r>
@@ -9095,7 +9142,7 @@
       </p:sp>
       <p:graphicFrame>
         <p:nvGraphicFramePr>
-          <p:cNvPr id="5" name="Chart 0" descr=""/>
+          <p:cNvPr id="5" name="Chart 0"/>
           <p:cNvGraphicFramePr/>
           <p:nvPr/>
         </p:nvGraphicFramePr>
@@ -9103,225 +9150,15 @@
           <a:off x="5120640" y="731520"/>
           <a:ext cx="3749040" cy="3200400"/>
         </p:xfrm>
-        <a:graphic xmlns:a="http://schemas.openxmlformats.org/drawingml/2006/main">
+        <a:graphic>
           <a:graphicData uri="http://schemas.openxmlformats.org/drawingml/2006/chart">
-            <c:chart xmlns:c="http://schemas.openxmlformats.org/drawingml/2006/chart" r:id="rId1"/>
+            <c:chart xmlns:c="http://schemas.openxmlformats.org/drawingml/2006/chart" xmlns:r="http://schemas.openxmlformats.org/officeDocument/2006/relationships" r:id="rId3"/>
           </a:graphicData>
         </a:graphic>
       </p:graphicFrame>
       <p:pic>
         <p:nvPicPr>
-          <p:cNvPr id="6" name="Image 0" descr="preencoded.png">    </p:cNvPr>
-          <p:cNvPicPr>
-            <a:picLocks noChangeAspect="1"/>
-          </p:cNvPicPr>
-          <p:nvPr/>
-        </p:nvPicPr>
-        <p:blipFill>
-          <a:blip r:embed="rId2"/>
-          <a:stretch>
-            <a:fillRect/>
-          </a:stretch>
-        </p:blipFill>
-        <p:spPr>
-          <a:xfrm>
-            <a:off x="347472" y="1243584"/>
-            <a:ext cx="292608" cy="292608"/>
-          </a:xfrm>
-          <a:prstGeom prst="rect">
-            <a:avLst/>
-          </a:prstGeom>
-        </p:spPr>
-      </p:pic>
-      <p:sp>
-        <p:nvSpPr>
-          <p:cNvPr id="7" name="Text 3"/>
-          <p:cNvSpPr/>
-          <p:nvPr/>
-        </p:nvSpPr>
-        <p:spPr>
-          <a:xfrm>
-            <a:off x="731520" y="1170432"/>
-            <a:ext cx="4206240" cy="347472"/>
-          </a:xfrm>
-          <a:prstGeom prst="rect">
-            <a:avLst/>
-          </a:prstGeom>
-          <a:noFill/>
-          <a:ln/>
-        </p:spPr>
-        <p:txBody>
-          <a:bodyPr wrap="square" lIns="0" tIns="0" rIns="0" bIns="0" rtlCol="0" anchor="ctr"/>
-          <a:lstStyle/>
-          <a:p>
-            <a:pPr indent="0" marL="0">
-              <a:buNone/>
-            </a:pPr>
-            <a:r>
-              <a:rPr lang="en-US" sz="1300" b="1" dirty="0">
-                <a:solidFill>
-                  <a:srgbClr val="2E2E2E"/>
-                </a:solidFill>
-                <a:latin typeface="Georgia" pitchFamily="34" charset="0"/>
-                <a:ea typeface="Georgia" pitchFamily="34" charset="-122"/>
-                <a:cs typeface="Georgia" pitchFamily="34" charset="-120"/>
-              </a:rPr>
-              <a:t>50% — Employee Pool</a:t>
-            </a:r>
-            <a:endParaRPr lang="en-US" sz="1300" dirty="0"/>
-          </a:p>
-        </p:txBody>
-      </p:sp>
-      <p:sp>
-        <p:nvSpPr>
-          <p:cNvPr id="8" name="Text 4"/>
-          <p:cNvSpPr/>
-          <p:nvPr/>
-        </p:nvSpPr>
-        <p:spPr>
-          <a:xfrm>
-            <a:off x="731520" y="1517904"/>
-            <a:ext cx="4206240" cy="502920"/>
-          </a:xfrm>
-          <a:prstGeom prst="rect">
-            <a:avLst/>
-          </a:prstGeom>
-          <a:noFill/>
-          <a:ln/>
-        </p:spPr>
-        <p:txBody>
-          <a:bodyPr wrap="square" lIns="0" tIns="0" rIns="0" bIns="0" rtlCol="0" anchor="ctr"/>
-          <a:lstStyle/>
-          <a:p>
-            <a:pPr indent="0" marL="0">
-              <a:lnSpc>
-                <a:spcPct val="120000"/>
-              </a:lnSpc>
-              <a:buNone/>
-            </a:pPr>
-            <a:r>
-              <a:rPr lang="en-US" sz="1100" dirty="0">
-                <a:solidFill>
-                  <a:srgbClr val="555555"/>
-                </a:solidFill>
-                <a:latin typeface="Calibri" pitchFamily="34" charset="0"/>
-                <a:ea typeface="Calibri" pitchFamily="34" charset="-122"/>
-                <a:cs typeface="Calibri" pitchFamily="34" charset="-120"/>
-              </a:rPr>
-              <a:t>Living wages + bonuses. Strict 2:1 pay ratio (max to min). You work, you share.</a:t>
-            </a:r>
-            <a:endParaRPr lang="en-US" sz="1100" dirty="0"/>
-          </a:p>
-        </p:txBody>
-      </p:sp>
-      <p:pic>
-        <p:nvPicPr>
-          <p:cNvPr id="9" name="Image 1" descr="preencoded.png">    </p:cNvPr>
-          <p:cNvPicPr>
-            <a:picLocks noChangeAspect="1"/>
-          </p:cNvPicPr>
-          <p:nvPr/>
-        </p:nvPicPr>
-        <p:blipFill>
-          <a:blip r:embed="rId3"/>
-          <a:stretch>
-            <a:fillRect/>
-          </a:stretch>
-        </p:blipFill>
-        <p:spPr>
-          <a:xfrm>
-            <a:off x="347472" y="2130552"/>
-            <a:ext cx="292608" cy="292608"/>
-          </a:xfrm>
-          <a:prstGeom prst="rect">
-            <a:avLst/>
-          </a:prstGeom>
-        </p:spPr>
-      </p:pic>
-      <p:sp>
-        <p:nvSpPr>
-          <p:cNvPr id="10" name="Text 5"/>
-          <p:cNvSpPr/>
-          <p:nvPr/>
-        </p:nvSpPr>
-        <p:spPr>
-          <a:xfrm>
-            <a:off x="731520" y="2057400"/>
-            <a:ext cx="4206240" cy="347472"/>
-          </a:xfrm>
-          <a:prstGeom prst="rect">
-            <a:avLst/>
-          </a:prstGeom>
-          <a:noFill/>
-          <a:ln/>
-        </p:spPr>
-        <p:txBody>
-          <a:bodyPr wrap="square" lIns="0" tIns="0" rIns="0" bIns="0" rtlCol="0" anchor="ctr"/>
-          <a:lstStyle/>
-          <a:p>
-            <a:pPr indent="0" marL="0">
-              <a:buNone/>
-            </a:pPr>
-            <a:r>
-              <a:rPr lang="en-US" sz="1300" b="1" dirty="0">
-                <a:solidFill>
-                  <a:srgbClr val="2E2E2E"/>
-                </a:solidFill>
-                <a:latin typeface="Georgia" pitchFamily="34" charset="0"/>
-                <a:ea typeface="Georgia" pitchFamily="34" charset="-122"/>
-                <a:cs typeface="Georgia" pitchFamily="34" charset="-120"/>
-              </a:rPr>
-              <a:t>30% — Local Development</a:t>
-            </a:r>
-            <a:endParaRPr lang="en-US" sz="1300" dirty="0"/>
-          </a:p>
-        </p:txBody>
-      </p:sp>
-      <p:sp>
-        <p:nvSpPr>
-          <p:cNvPr id="11" name="Text 6"/>
-          <p:cNvSpPr/>
-          <p:nvPr/>
-        </p:nvSpPr>
-        <p:spPr>
-          <a:xfrm>
-            <a:off x="731520" y="2404872"/>
-            <a:ext cx="4206240" cy="502920"/>
-          </a:xfrm>
-          <a:prstGeom prst="rect">
-            <a:avLst/>
-          </a:prstGeom>
-          <a:noFill/>
-          <a:ln/>
-        </p:spPr>
-        <p:txBody>
-          <a:bodyPr wrap="square" lIns="0" tIns="0" rIns="0" bIns="0" rtlCol="0" anchor="ctr"/>
-          <a:lstStyle/>
-          <a:p>
-            <a:pPr indent="0" marL="0">
-              <a:lnSpc>
-                <a:spcPct val="120000"/>
-              </a:lnSpc>
-              <a:buNone/>
-            </a:pPr>
-            <a:r>
-              <a:rPr lang="en-US" sz="1100" dirty="0">
-                <a:solidFill>
-                  <a:srgbClr val="555555"/>
-                </a:solidFill>
-                <a:latin typeface="Calibri" pitchFamily="34" charset="0"/>
-                <a:ea typeface="Calibri" pitchFamily="34" charset="-122"/>
-                <a:cs typeface="Calibri" pitchFamily="34" charset="-120"/>
-              </a:rPr>
-              <a:t>Operations, inputs, debt, and MRV. Any surplus buys more land.</a:t>
-            </a:r>
-            <a:endParaRPr lang="en-US" sz="1100" dirty="0"/>
-          </a:p>
-        </p:txBody>
-      </p:sp>
-      <p:pic>
-        <p:nvPicPr>
-          <p:cNvPr id="12" name="Image 2" descr="preencoded.png">    </p:cNvPr>
+          <p:cNvPr id="6" name="Image 0" descr="preencoded.png"/>
           <p:cNvPicPr>
             <a:picLocks noChangeAspect="1"/>
           </p:cNvPicPr>
@@ -9335,7 +9172,7 @@
         </p:blipFill>
         <p:spPr>
           <a:xfrm>
-            <a:off x="347472" y="3017520"/>
+            <a:off x="347472" y="1243584"/>
             <a:ext cx="292608" cy="292608"/>
           </a:xfrm>
           <a:prstGeom prst="rect">
@@ -9345,13 +9182,13 @@
       </p:pic>
       <p:sp>
         <p:nvSpPr>
-          <p:cNvPr id="13" name="Text 7"/>
-          <p:cNvSpPr/>
-          <p:nvPr/>
-        </p:nvSpPr>
-        <p:spPr>
-          <a:xfrm>
-            <a:off x="731520" y="2944368"/>
+          <p:cNvPr id="7" name="Text 3"/>
+          <p:cNvSpPr/>
+          <p:nvPr/>
+        </p:nvSpPr>
+        <p:spPr>
+          <a:xfrm>
+            <a:off x="731520" y="1170432"/>
             <a:ext cx="4206240" cy="347472"/>
           </a:xfrm>
           <a:prstGeom prst="rect">
@@ -9364,7 +9201,7 @@
           <a:bodyPr wrap="square" lIns="0" tIns="0" rIns="0" bIns="0" rtlCol="0" anchor="ctr"/>
           <a:lstStyle/>
           <a:p>
-            <a:pPr indent="0" marL="0">
+            <a:pPr marL="0" indent="0">
               <a:buNone/>
             </a:pPr>
             <a:r>
@@ -9376,7 +9213,7 @@
                 <a:ea typeface="Georgia" pitchFamily="34" charset="-122"/>
                 <a:cs typeface="Georgia" pitchFamily="34" charset="-120"/>
               </a:rPr>
-              <a:t>10% — Replication Fund</a:t>
+              <a:t>50% — Employee Pool</a:t>
             </a:r>
             <a:endParaRPr lang="en-US" sz="1300" dirty="0"/>
           </a:p>
@@ -9384,13 +9221,13 @@
       </p:sp>
       <p:sp>
         <p:nvSpPr>
-          <p:cNvPr id="14" name="Text 8"/>
-          <p:cNvSpPr/>
-          <p:nvPr/>
-        </p:nvSpPr>
-        <p:spPr>
-          <a:xfrm>
-            <a:off x="731520" y="3291840"/>
+          <p:cNvPr id="8" name="Text 4"/>
+          <p:cNvSpPr/>
+          <p:nvPr/>
+        </p:nvSpPr>
+        <p:spPr>
+          <a:xfrm>
+            <a:off x="731520" y="1517904"/>
             <a:ext cx="4206240" cy="502920"/>
           </a:xfrm>
           <a:prstGeom prst="rect">
@@ -9403,7 +9240,7 @@
           <a:bodyPr wrap="square" lIns="0" tIns="0" rIns="0" bIns="0" rtlCol="0" anchor="ctr"/>
           <a:lstStyle/>
           <a:p>
-            <a:pPr indent="0" marL="0">
+            <a:pPr marL="0" indent="0">
               <a:lnSpc>
                 <a:spcPct val="120000"/>
               </a:lnSpc>
@@ -9418,7 +9255,7 @@
                 <a:ea typeface="Calibri" pitchFamily="34" charset="-122"/>
                 <a:cs typeface="Calibri" pitchFamily="34" charset="-120"/>
               </a:rPr>
-              <a:t>Seeds the next satellite hub — run by promoted stewards from this one.</a:t>
+              <a:t>Living wages + bonuses. Strict 2:1 pay ratio (max to min). You work, you share.</a:t>
             </a:r>
             <a:endParaRPr lang="en-US" sz="1100" dirty="0"/>
           </a:p>
@@ -9426,7 +9263,7 @@
       </p:sp>
       <p:pic>
         <p:nvPicPr>
-          <p:cNvPr id="15" name="Image 3" descr="preencoded.png">    </p:cNvPr>
+          <p:cNvPr id="9" name="Image 1" descr="preencoded.png"/>
           <p:cNvPicPr>
             <a:picLocks noChangeAspect="1"/>
           </p:cNvPicPr>
@@ -9440,7 +9277,7 @@
         </p:blipFill>
         <p:spPr>
           <a:xfrm>
-            <a:off x="347472" y="3904488"/>
+            <a:off x="347472" y="2130552"/>
             <a:ext cx="292608" cy="292608"/>
           </a:xfrm>
           <a:prstGeom prst="rect">
@@ -9450,13 +9287,13 @@
       </p:pic>
       <p:sp>
         <p:nvSpPr>
-          <p:cNvPr id="16" name="Text 9"/>
-          <p:cNvSpPr/>
-          <p:nvPr/>
-        </p:nvSpPr>
-        <p:spPr>
-          <a:xfrm>
-            <a:off x="731520" y="3831336"/>
+          <p:cNvPr id="10" name="Text 5"/>
+          <p:cNvSpPr/>
+          <p:nvPr/>
+        </p:nvSpPr>
+        <p:spPr>
+          <a:xfrm>
+            <a:off x="731520" y="2057400"/>
             <a:ext cx="4206240" cy="347472"/>
           </a:xfrm>
           <a:prstGeom prst="rect">
@@ -9469,7 +9306,7 @@
           <a:bodyPr wrap="square" lIns="0" tIns="0" rIns="0" bIns="0" rtlCol="0" anchor="ctr"/>
           <a:lstStyle/>
           <a:p>
-            <a:pPr indent="0" marL="0">
+            <a:pPr marL="0" indent="0">
               <a:buNone/>
             </a:pPr>
             <a:r>
@@ -9481,7 +9318,7 @@
                 <a:ea typeface="Georgia" pitchFamily="34" charset="-122"/>
                 <a:cs typeface="Georgia" pitchFamily="34" charset="-120"/>
               </a:rPr>
-              <a:t>10% — Modern Druid Central</a:t>
+              <a:t>30% — Local Development</a:t>
             </a:r>
             <a:endParaRPr lang="en-US" sz="1300" dirty="0"/>
           </a:p>
@@ -9489,13 +9326,13 @@
       </p:sp>
       <p:sp>
         <p:nvSpPr>
-          <p:cNvPr id="17" name="Text 10"/>
-          <p:cNvSpPr/>
-          <p:nvPr/>
-        </p:nvSpPr>
-        <p:spPr>
-          <a:xfrm>
-            <a:off x="731520" y="4178808"/>
+          <p:cNvPr id="11" name="Text 6"/>
+          <p:cNvSpPr/>
+          <p:nvPr/>
+        </p:nvSpPr>
+        <p:spPr>
+          <a:xfrm>
+            <a:off x="731520" y="2404872"/>
             <a:ext cx="4206240" cy="502920"/>
           </a:xfrm>
           <a:prstGeom prst="rect">
@@ -9508,7 +9345,7 @@
           <a:bodyPr wrap="square" lIns="0" tIns="0" rIns="0" bIns="0" rtlCol="0" anchor="ctr"/>
           <a:lstStyle/>
           <a:p>
-            <a:pPr indent="0" marL="0">
+            <a:pPr marL="0" indent="0">
               <a:lnSpc>
                 <a:spcPct val="120000"/>
               </a:lnSpc>
@@ -9523,6 +9360,216 @@
                 <a:ea typeface="Calibri" pitchFamily="34" charset="-122"/>
                 <a:cs typeface="Calibri" pitchFamily="34" charset="-120"/>
               </a:rPr>
+              <a:t>Operations, inputs, debt, and MRV. Any surplus buys more land.</a:t>
+            </a:r>
+            <a:endParaRPr lang="en-US" sz="1100" dirty="0"/>
+          </a:p>
+        </p:txBody>
+      </p:sp>
+      <p:pic>
+        <p:nvPicPr>
+          <p:cNvPr id="12" name="Image 2" descr="preencoded.png"/>
+          <p:cNvPicPr>
+            <a:picLocks noChangeAspect="1"/>
+          </p:cNvPicPr>
+          <p:nvPr/>
+        </p:nvPicPr>
+        <p:blipFill>
+          <a:blip r:embed="rId6"/>
+          <a:stretch>
+            <a:fillRect/>
+          </a:stretch>
+        </p:blipFill>
+        <p:spPr>
+          <a:xfrm>
+            <a:off x="347472" y="3017520"/>
+            <a:ext cx="292608" cy="292608"/>
+          </a:xfrm>
+          <a:prstGeom prst="rect">
+            <a:avLst/>
+          </a:prstGeom>
+        </p:spPr>
+      </p:pic>
+      <p:sp>
+        <p:nvSpPr>
+          <p:cNvPr id="13" name="Text 7"/>
+          <p:cNvSpPr/>
+          <p:nvPr/>
+        </p:nvSpPr>
+        <p:spPr>
+          <a:xfrm>
+            <a:off x="731520" y="2944368"/>
+            <a:ext cx="4206240" cy="347472"/>
+          </a:xfrm>
+          <a:prstGeom prst="rect">
+            <a:avLst/>
+          </a:prstGeom>
+          <a:noFill/>
+          <a:ln/>
+        </p:spPr>
+        <p:txBody>
+          <a:bodyPr wrap="square" lIns="0" tIns="0" rIns="0" bIns="0" rtlCol="0" anchor="ctr"/>
+          <a:lstStyle/>
+          <a:p>
+            <a:pPr marL="0" indent="0">
+              <a:buNone/>
+            </a:pPr>
+            <a:r>
+              <a:rPr lang="en-US" sz="1300" b="1" dirty="0">
+                <a:solidFill>
+                  <a:srgbClr val="2E2E2E"/>
+                </a:solidFill>
+                <a:latin typeface="Georgia" pitchFamily="34" charset="0"/>
+                <a:ea typeface="Georgia" pitchFamily="34" charset="-122"/>
+                <a:cs typeface="Georgia" pitchFamily="34" charset="-120"/>
+              </a:rPr>
+              <a:t>10% — Replication Fund</a:t>
+            </a:r>
+            <a:endParaRPr lang="en-US" sz="1300" dirty="0"/>
+          </a:p>
+        </p:txBody>
+      </p:sp>
+      <p:sp>
+        <p:nvSpPr>
+          <p:cNvPr id="14" name="Text 8"/>
+          <p:cNvSpPr/>
+          <p:nvPr/>
+        </p:nvSpPr>
+        <p:spPr>
+          <a:xfrm>
+            <a:off x="731520" y="3291840"/>
+            <a:ext cx="4206240" cy="502920"/>
+          </a:xfrm>
+          <a:prstGeom prst="rect">
+            <a:avLst/>
+          </a:prstGeom>
+          <a:noFill/>
+          <a:ln/>
+        </p:spPr>
+        <p:txBody>
+          <a:bodyPr wrap="square" lIns="0" tIns="0" rIns="0" bIns="0" rtlCol="0" anchor="ctr"/>
+          <a:lstStyle/>
+          <a:p>
+            <a:pPr marL="0" indent="0">
+              <a:lnSpc>
+                <a:spcPct val="120000"/>
+              </a:lnSpc>
+              <a:buNone/>
+            </a:pPr>
+            <a:r>
+              <a:rPr lang="en-US" sz="1100" dirty="0">
+                <a:solidFill>
+                  <a:srgbClr val="555555"/>
+                </a:solidFill>
+                <a:latin typeface="Calibri" pitchFamily="34" charset="0"/>
+                <a:ea typeface="Calibri" pitchFamily="34" charset="-122"/>
+                <a:cs typeface="Calibri" pitchFamily="34" charset="-120"/>
+              </a:rPr>
+              <a:t>Seeds the next satellite hub — run by promoted stewards from this one.</a:t>
+            </a:r>
+            <a:endParaRPr lang="en-US" sz="1100" dirty="0"/>
+          </a:p>
+        </p:txBody>
+      </p:sp>
+      <p:pic>
+        <p:nvPicPr>
+          <p:cNvPr id="15" name="Image 3" descr="preencoded.png"/>
+          <p:cNvPicPr>
+            <a:picLocks noChangeAspect="1"/>
+          </p:cNvPicPr>
+          <p:nvPr/>
+        </p:nvPicPr>
+        <p:blipFill>
+          <a:blip r:embed="rId7"/>
+          <a:stretch>
+            <a:fillRect/>
+          </a:stretch>
+        </p:blipFill>
+        <p:spPr>
+          <a:xfrm>
+            <a:off x="347472" y="3904488"/>
+            <a:ext cx="292608" cy="292608"/>
+          </a:xfrm>
+          <a:prstGeom prst="rect">
+            <a:avLst/>
+          </a:prstGeom>
+        </p:spPr>
+      </p:pic>
+      <p:sp>
+        <p:nvSpPr>
+          <p:cNvPr id="16" name="Text 9"/>
+          <p:cNvSpPr/>
+          <p:nvPr/>
+        </p:nvSpPr>
+        <p:spPr>
+          <a:xfrm>
+            <a:off x="731520" y="3831336"/>
+            <a:ext cx="4206240" cy="347472"/>
+          </a:xfrm>
+          <a:prstGeom prst="rect">
+            <a:avLst/>
+          </a:prstGeom>
+          <a:noFill/>
+          <a:ln/>
+        </p:spPr>
+        <p:txBody>
+          <a:bodyPr wrap="square" lIns="0" tIns="0" rIns="0" bIns="0" rtlCol="0" anchor="ctr"/>
+          <a:lstStyle/>
+          <a:p>
+            <a:pPr marL="0" indent="0">
+              <a:buNone/>
+            </a:pPr>
+            <a:r>
+              <a:rPr lang="en-US" sz="1300" b="1" dirty="0">
+                <a:solidFill>
+                  <a:srgbClr val="2E2E2E"/>
+                </a:solidFill>
+                <a:latin typeface="Georgia" pitchFamily="34" charset="0"/>
+                <a:ea typeface="Georgia" pitchFamily="34" charset="-122"/>
+                <a:cs typeface="Georgia" pitchFamily="34" charset="-120"/>
+              </a:rPr>
+              <a:t>10% — Modern Druid Central</a:t>
+            </a:r>
+            <a:endParaRPr lang="en-US" sz="1300" dirty="0"/>
+          </a:p>
+        </p:txBody>
+      </p:sp>
+      <p:sp>
+        <p:nvSpPr>
+          <p:cNvPr id="17" name="Text 10"/>
+          <p:cNvSpPr/>
+          <p:nvPr/>
+        </p:nvSpPr>
+        <p:spPr>
+          <a:xfrm>
+            <a:off x="731520" y="4178808"/>
+            <a:ext cx="4206240" cy="502920"/>
+          </a:xfrm>
+          <a:prstGeom prst="rect">
+            <a:avLst/>
+          </a:prstGeom>
+          <a:noFill/>
+          <a:ln/>
+        </p:spPr>
+        <p:txBody>
+          <a:bodyPr wrap="square" lIns="0" tIns="0" rIns="0" bIns="0" rtlCol="0" anchor="ctr"/>
+          <a:lstStyle/>
+          <a:p>
+            <a:pPr marL="0" indent="0">
+              <a:lnSpc>
+                <a:spcPct val="120000"/>
+              </a:lnSpc>
+              <a:buNone/>
+            </a:pPr>
+            <a:r>
+              <a:rPr lang="en-US" sz="1100" dirty="0">
+                <a:solidFill>
+                  <a:srgbClr val="555555"/>
+                </a:solidFill>
+                <a:latin typeface="Calibri" pitchFamily="34" charset="0"/>
+                <a:ea typeface="Calibri" pitchFamily="34" charset="-122"/>
+                <a:cs typeface="Calibri" pitchFamily="34" charset="-120"/>
+              </a:rPr>
               <a:t>R&amp;D, open-source toolkit, and seeding hubs in underserved regions globally.</a:t>
             </a:r>
             <a:endParaRPr lang="en-US" sz="1100" dirty="0"/>
@@ -9550,7 +9597,7 @@
           <a:bodyPr wrap="square" lIns="0" tIns="0" rIns="0" bIns="0" rtlCol="0" anchor="ctr"/>
           <a:lstStyle/>
           <a:p>
-            <a:pPr algn="ctr" indent="0" marL="0">
+            <a:pPr marL="0" indent="0" algn="ctr">
               <a:buNone/>
             </a:pPr>
             <a:r>
@@ -9584,6 +9631,7 @@
         <a:solidFill>
           <a:srgbClr val="1A2A1A"/>
         </a:solidFill>
+        <a:effectLst/>
       </p:bgPr>
     </p:bg>
     <p:spTree>
@@ -9627,14 +9675,14 @@
       </p:sp>
       <p:pic>
         <p:nvPicPr>
-          <p:cNvPr id="3" name="Image 0" descr="preencoded.png">    </p:cNvPr>
+          <p:cNvPr id="3" name="Image 0" descr="preencoded.png"/>
           <p:cNvPicPr>
             <a:picLocks noChangeAspect="1"/>
           </p:cNvPicPr>
           <p:nvPr/>
         </p:nvPicPr>
         <p:blipFill>
-          <a:blip r:embed="rId1">
+          <a:blip r:embed="rId3">
             <a:alphaModFix amt="20000"/>
           </a:blip>
           <a:stretch>
@@ -9672,11 +9720,11 @@
           <a:bodyPr wrap="square" lIns="0" tIns="0" rIns="0" bIns="0" rtlCol="0" anchor="ctr"/>
           <a:lstStyle/>
           <a:p>
-            <a:pPr indent="0" marL="0">
-              <a:buNone/>
-            </a:pPr>
-            <a:r>
-              <a:rPr lang="en-US" sz="900" b="1" spc="300" kern="0" dirty="0">
+            <a:pPr marL="0" indent="0">
+              <a:buNone/>
+            </a:pPr>
+            <a:r>
+              <a:rPr lang="en-US" sz="900" b="1" kern="0" spc="300" dirty="0">
                 <a:solidFill>
                   <a:srgbClr val="97BC62"/>
                 </a:solidFill>
@@ -9711,7 +9759,7 @@
           <a:bodyPr wrap="square" lIns="0" tIns="0" rIns="0" bIns="0" rtlCol="0" anchor="ctr"/>
           <a:lstStyle/>
           <a:p>
-            <a:pPr indent="0" marL="0">
+            <a:pPr marL="0" indent="0">
               <a:buNone/>
             </a:pPr>
             <a:r>
@@ -9750,7 +9798,7 @@
           <a:bodyPr wrap="square" lIns="0" tIns="0" rIns="0" bIns="0" rtlCol="0" anchor="ctr"/>
           <a:lstStyle/>
           <a:p>
-            <a:pPr indent="0" marL="0">
+            <a:pPr marL="0" indent="0">
               <a:buNone/>
             </a:pPr>
             <a:r>
@@ -9770,7 +9818,7 @@
       </p:sp>
       <p:graphicFrame>
         <p:nvGraphicFramePr>
-          <p:cNvPr id="7" name="Chart 0" descr=""/>
+          <p:cNvPr id="7" name="Chart 0"/>
           <p:cNvGraphicFramePr/>
           <p:nvPr/>
         </p:nvGraphicFramePr>
@@ -9778,9 +9826,9 @@
           <a:off x="320040" y="1828800"/>
           <a:ext cx="5029200" cy="3017520"/>
         </p:xfrm>
-        <a:graphic xmlns:a="http://schemas.openxmlformats.org/drawingml/2006/main">
+        <a:graphic>
           <a:graphicData uri="http://schemas.openxmlformats.org/drawingml/2006/chart">
-            <c:chart xmlns:c="http://schemas.openxmlformats.org/drawingml/2006/chart" r:id="rId2"/>
+            <c:chart xmlns:c="http://schemas.openxmlformats.org/drawingml/2006/chart" xmlns:r="http://schemas.openxmlformats.org/officeDocument/2006/relationships" r:id="rId4"/>
           </a:graphicData>
         </a:graphic>
       </p:graphicFrame>
@@ -9808,7 +9856,7 @@
             <a:prstDash val="solid"/>
           </a:ln>
           <a:effectLst>
-            <a:outerShdw sx="100000" sy="100000" kx="0" ky="0" algn="bl" rotWithShape="0" blurRad="101600" dist="38100" dir="8100000">
+            <a:outerShdw blurRad="101600" dist="38100" dir="8100000" algn="bl" rotWithShape="0">
               <a:srgbClr val="000000">
                 <a:alpha val="18000"/>
               </a:srgbClr>
@@ -9837,7 +9885,7 @@
           <a:bodyPr wrap="square" lIns="0" tIns="0" rIns="0" bIns="0" rtlCol="0" anchor="ctr"/>
           <a:lstStyle/>
           <a:p>
-            <a:pPr algn="ctr" indent="0" marL="0">
+            <a:pPr marL="0" indent="0" algn="ctr">
               <a:buNone/>
             </a:pPr>
             <a:r>
@@ -9876,7 +9924,7 @@
           <a:bodyPr wrap="square" lIns="0" tIns="0" rIns="0" bIns="0" rtlCol="0" anchor="ctr"/>
           <a:lstStyle/>
           <a:p>
-            <a:pPr algn="ctr" indent="0" marL="0">
+            <a:pPr marL="0" indent="0" algn="ctr">
               <a:lnSpc>
                 <a:spcPct val="120000"/>
               </a:lnSpc>
@@ -9896,7 +9944,7 @@
             <a:endParaRPr lang="en-US" sz="1050" dirty="0"/>
           </a:p>
           <a:p>
-            <a:pPr algn="ctr" indent="0" marL="0">
+            <a:pPr marL="0" indent="0" algn="ctr">
               <a:lnSpc>
                 <a:spcPct val="120000"/>
               </a:lnSpc>
@@ -9941,7 +9989,7 @@
             <a:prstDash val="solid"/>
           </a:ln>
           <a:effectLst>
-            <a:outerShdw sx="100000" sy="100000" kx="0" ky="0" algn="bl" rotWithShape="0" blurRad="101600" dist="38100" dir="8100000">
+            <a:outerShdw blurRad="101600" dist="38100" dir="8100000" algn="bl" rotWithShape="0">
               <a:srgbClr val="000000">
                 <a:alpha val="18000"/>
               </a:srgbClr>
@@ -9970,7 +10018,7 @@
           <a:bodyPr wrap="square" lIns="0" tIns="0" rIns="0" bIns="0" rtlCol="0" anchor="ctr"/>
           <a:lstStyle/>
           <a:p>
-            <a:pPr algn="ctr" indent="0" marL="0">
+            <a:pPr marL="0" indent="0" algn="ctr">
               <a:buNone/>
             </a:pPr>
             <a:r>
@@ -10009,7 +10057,7 @@
           <a:bodyPr wrap="square" lIns="0" tIns="0" rIns="0" bIns="0" rtlCol="0" anchor="ctr"/>
           <a:lstStyle/>
           <a:p>
-            <a:pPr algn="ctr" indent="0" marL="0">
+            <a:pPr marL="0" indent="0" algn="ctr">
               <a:lnSpc>
                 <a:spcPct val="120000"/>
               </a:lnSpc>
@@ -10029,7 +10077,7 @@
             <a:endParaRPr lang="en-US" sz="1050" dirty="0"/>
           </a:p>
           <a:p>
-            <a:pPr algn="ctr" indent="0" marL="0">
+            <a:pPr marL="0" indent="0" algn="ctr">
               <a:lnSpc>
                 <a:spcPct val="120000"/>
               </a:lnSpc>
@@ -10074,7 +10122,7 @@
             <a:prstDash val="solid"/>
           </a:ln>
           <a:effectLst>
-            <a:outerShdw sx="100000" sy="100000" kx="0" ky="0" algn="bl" rotWithShape="0" blurRad="101600" dist="38100" dir="8100000">
+            <a:outerShdw blurRad="101600" dist="38100" dir="8100000" algn="bl" rotWithShape="0">
               <a:srgbClr val="000000">
                 <a:alpha val="18000"/>
               </a:srgbClr>
@@ -10103,7 +10151,7 @@
           <a:bodyPr wrap="square" lIns="0" tIns="0" rIns="0" bIns="0" rtlCol="0" anchor="ctr"/>
           <a:lstStyle/>
           <a:p>
-            <a:pPr algn="ctr" indent="0" marL="0">
+            <a:pPr marL="0" indent="0" algn="ctr">
               <a:buNone/>
             </a:pPr>
             <a:r>
@@ -10142,7 +10190,7 @@
           <a:bodyPr wrap="square" lIns="0" tIns="0" rIns="0" bIns="0" rtlCol="0" anchor="ctr"/>
           <a:lstStyle/>
           <a:p>
-            <a:pPr algn="ctr" indent="0" marL="0">
+            <a:pPr marL="0" indent="0" algn="ctr">
               <a:lnSpc>
                 <a:spcPct val="120000"/>
               </a:lnSpc>
@@ -10162,7 +10210,7 @@
             <a:endParaRPr lang="en-US" sz="1050" dirty="0"/>
           </a:p>
           <a:p>
-            <a:pPr algn="ctr" indent="0" marL="0">
+            <a:pPr marL="0" indent="0" algn="ctr">
               <a:lnSpc>
                 <a:spcPct val="120000"/>
               </a:lnSpc>
@@ -10204,7 +10252,7 @@
           <a:bodyPr wrap="square" lIns="0" tIns="0" rIns="0" bIns="0" rtlCol="0" anchor="ctr"/>
           <a:lstStyle/>
           <a:p>
-            <a:pPr algn="ctr" indent="0" marL="0">
+            <a:pPr marL="0" indent="0" algn="ctr">
               <a:buNone/>
             </a:pPr>
             <a:r>
@@ -10238,6 +10286,7 @@
         <a:solidFill>
           <a:srgbClr val="F2EFE5"/>
         </a:solidFill>
+        <a:effectLst/>
       </p:bgPr>
     </p:bg>
     <p:spTree>
@@ -10300,11 +10349,11 @@
           <a:bodyPr wrap="square" lIns="0" tIns="0" rIns="0" bIns="0" rtlCol="0" anchor="ctr"/>
           <a:lstStyle/>
           <a:p>
-            <a:pPr indent="0" marL="0">
-              <a:buNone/>
-            </a:pPr>
-            <a:r>
-              <a:rPr lang="en-US" sz="900" b="1" spc="300" kern="0" dirty="0">
+            <a:pPr marL="0" indent="0">
+              <a:buNone/>
+            </a:pPr>
+            <a:r>
+              <a:rPr lang="en-US" sz="900" b="1" kern="0" spc="300" dirty="0">
                 <a:solidFill>
                   <a:srgbClr val="97BC62"/>
                 </a:solidFill>
@@ -10339,7 +10388,7 @@
           <a:bodyPr wrap="square" lIns="0" tIns="0" rIns="0" bIns="0" rtlCol="0" anchor="ctr"/>
           <a:lstStyle/>
           <a:p>
-            <a:pPr indent="0" marL="0">
+            <a:pPr marL="0" indent="0">
               <a:buNone/>
             </a:pPr>
             <a:r>
@@ -10359,7 +10408,7 @@
       </p:sp>
       <p:graphicFrame>
         <p:nvGraphicFramePr>
-          <p:cNvPr id="5" name="Chart 0" descr=""/>
+          <p:cNvPr id="5" name="Chart 0"/>
           <p:cNvGraphicFramePr/>
           <p:nvPr/>
         </p:nvGraphicFramePr>
@@ -10367,9 +10416,9 @@
           <a:off x="329184" y="1097280"/>
           <a:ext cx="5303520" cy="3200400"/>
         </p:xfrm>
-        <a:graphic xmlns:a="http://schemas.openxmlformats.org/drawingml/2006/main">
+        <a:graphic>
           <a:graphicData uri="http://schemas.openxmlformats.org/drawingml/2006/chart">
-            <c:chart xmlns:c="http://schemas.openxmlformats.org/drawingml/2006/chart" r:id="rId1"/>
+            <c:chart xmlns:c="http://schemas.openxmlformats.org/drawingml/2006/chart" xmlns:r="http://schemas.openxmlformats.org/officeDocument/2006/relationships" r:id="rId3"/>
           </a:graphicData>
         </a:graphic>
       </p:graphicFrame>
@@ -10397,7 +10446,7 @@
             <a:prstDash val="solid"/>
           </a:ln>
           <a:effectLst>
-            <a:outerShdw sx="100000" sy="100000" kx="0" ky="0" algn="bl" rotWithShape="0" blurRad="101600" dist="38100" dir="8100000">
+            <a:outerShdw blurRad="101600" dist="38100" dir="8100000" algn="bl" rotWithShape="0">
               <a:srgbClr val="000000">
                 <a:alpha val="18000"/>
               </a:srgbClr>
@@ -10451,7 +10500,7 @@
           <a:bodyPr wrap="square" lIns="0" tIns="0" rIns="0" bIns="0" rtlCol="0" anchor="ctr"/>
           <a:lstStyle/>
           <a:p>
-            <a:pPr algn="ctr" indent="0" marL="0">
+            <a:pPr marL="0" indent="0" algn="ctr">
               <a:buNone/>
             </a:pPr>
             <a:r>
@@ -10490,7 +10539,7 @@
           <a:bodyPr wrap="square" lIns="0" tIns="0" rIns="0" bIns="0" rtlCol="0" anchor="ctr"/>
           <a:lstStyle/>
           <a:p>
-            <a:pPr algn="ctr" indent="0" marL="0">
+            <a:pPr marL="0" indent="0" algn="ctr">
               <a:lnSpc>
                 <a:spcPct val="120000"/>
               </a:lnSpc>
@@ -10535,7 +10584,7 @@
             <a:prstDash val="solid"/>
           </a:ln>
           <a:effectLst>
-            <a:outerShdw sx="100000" sy="100000" kx="0" ky="0" algn="bl" rotWithShape="0" blurRad="101600" dist="38100" dir="8100000">
+            <a:outerShdw blurRad="101600" dist="38100" dir="8100000" algn="bl" rotWithShape="0">
               <a:srgbClr val="000000">
                 <a:alpha val="18000"/>
               </a:srgbClr>
@@ -10589,7 +10638,7 @@
           <a:bodyPr wrap="square" lIns="0" tIns="0" rIns="0" bIns="0" rtlCol="0" anchor="ctr"/>
           <a:lstStyle/>
           <a:p>
-            <a:pPr algn="ctr" indent="0" marL="0">
+            <a:pPr marL="0" indent="0" algn="ctr">
               <a:buNone/>
             </a:pPr>
             <a:r>
@@ -10628,7 +10677,7 @@
           <a:bodyPr wrap="square" lIns="0" tIns="0" rIns="0" bIns="0" rtlCol="0" anchor="ctr"/>
           <a:lstStyle/>
           <a:p>
-            <a:pPr algn="ctr" indent="0" marL="0">
+            <a:pPr marL="0" indent="0" algn="ctr">
               <a:lnSpc>
                 <a:spcPct val="120000"/>
               </a:lnSpc>
@@ -10673,7 +10722,7 @@
             <a:prstDash val="solid"/>
           </a:ln>
           <a:effectLst>
-            <a:outerShdw sx="100000" sy="100000" kx="0" ky="0" algn="bl" rotWithShape="0" blurRad="101600" dist="38100" dir="8100000">
+            <a:outerShdw blurRad="101600" dist="38100" dir="8100000" algn="bl" rotWithShape="0">
               <a:srgbClr val="000000">
                 <a:alpha val="18000"/>
               </a:srgbClr>
@@ -10727,7 +10776,7 @@
           <a:bodyPr wrap="square" lIns="0" tIns="0" rIns="0" bIns="0" rtlCol="0" anchor="ctr"/>
           <a:lstStyle/>
           <a:p>
-            <a:pPr algn="ctr" indent="0" marL="0">
+            <a:pPr marL="0" indent="0" algn="ctr">
               <a:buNone/>
             </a:pPr>
             <a:r>
@@ -10766,7 +10815,7 @@
           <a:bodyPr wrap="square" lIns="0" tIns="0" rIns="0" bIns="0" rtlCol="0" anchor="ctr"/>
           <a:lstStyle/>
           <a:p>
-            <a:pPr algn="ctr" indent="0" marL="0">
+            <a:pPr marL="0" indent="0" algn="ctr">
               <a:lnSpc>
                 <a:spcPct val="120000"/>
               </a:lnSpc>
@@ -10811,7 +10860,7 @@
             <a:prstDash val="solid"/>
           </a:ln>
           <a:effectLst>
-            <a:outerShdw sx="100000" sy="100000" kx="0" ky="0" algn="bl" rotWithShape="0" blurRad="101600" dist="38100" dir="8100000">
+            <a:outerShdw blurRad="101600" dist="38100" dir="8100000" algn="bl" rotWithShape="0">
               <a:srgbClr val="000000">
                 <a:alpha val="18000"/>
               </a:srgbClr>
@@ -10865,7 +10914,7 @@
           <a:bodyPr wrap="square" lIns="0" tIns="0" rIns="0" bIns="0" rtlCol="0" anchor="ctr"/>
           <a:lstStyle/>
           <a:p>
-            <a:pPr algn="ctr" indent="0" marL="0">
+            <a:pPr marL="0" indent="0" algn="ctr">
               <a:buNone/>
             </a:pPr>
             <a:r>
@@ -10904,7 +10953,7 @@
           <a:bodyPr wrap="square" lIns="0" tIns="0" rIns="0" bIns="0" rtlCol="0" anchor="ctr"/>
           <a:lstStyle/>
           <a:p>
-            <a:pPr algn="ctr" indent="0" marL="0">
+            <a:pPr marL="0" indent="0" algn="ctr">
               <a:lnSpc>
                 <a:spcPct val="120000"/>
               </a:lnSpc>
@@ -10949,7 +10998,7 @@
             <a:prstDash val="solid"/>
           </a:ln>
           <a:effectLst>
-            <a:outerShdw sx="100000" sy="100000" kx="0" ky="0" algn="bl" rotWithShape="0" blurRad="101600" dist="38100" dir="8100000">
+            <a:outerShdw blurRad="101600" dist="38100" dir="8100000" algn="bl" rotWithShape="0">
               <a:srgbClr val="000000">
                 <a:alpha val="18000"/>
               </a:srgbClr>
@@ -11003,7 +11052,7 @@
           <a:bodyPr wrap="square" lIns="0" tIns="0" rIns="0" bIns="0" rtlCol="0" anchor="ctr"/>
           <a:lstStyle/>
           <a:p>
-            <a:pPr algn="ctr" indent="0" marL="0">
+            <a:pPr marL="0" indent="0" algn="ctr">
               <a:buNone/>
             </a:pPr>
             <a:r>
@@ -11042,7 +11091,7 @@
           <a:bodyPr wrap="square" lIns="0" tIns="0" rIns="0" bIns="0" rtlCol="0" anchor="ctr"/>
           <a:lstStyle/>
           <a:p>
-            <a:pPr algn="ctr" indent="0" marL="0">
+            <a:pPr marL="0" indent="0" algn="ctr">
               <a:lnSpc>
                 <a:spcPct val="120000"/>
               </a:lnSpc>
@@ -11087,7 +11136,7 @@
             <a:prstDash val="solid"/>
           </a:ln>
           <a:effectLst>
-            <a:outerShdw sx="100000" sy="100000" kx="0" ky="0" algn="bl" rotWithShape="0" blurRad="101600" dist="38100" dir="8100000">
+            <a:outerShdw blurRad="101600" dist="38100" dir="8100000" algn="bl" rotWithShape="0">
               <a:srgbClr val="000000">
                 <a:alpha val="18000"/>
               </a:srgbClr>
@@ -11141,7 +11190,7 @@
           <a:bodyPr wrap="square" lIns="0" tIns="0" rIns="0" bIns="0" rtlCol="0" anchor="ctr"/>
           <a:lstStyle/>
           <a:p>
-            <a:pPr algn="ctr" indent="0" marL="0">
+            <a:pPr marL="0" indent="0" algn="ctr">
               <a:buNone/>
             </a:pPr>
             <a:r>
@@ -11180,7 +11229,7 @@
           <a:bodyPr wrap="square" lIns="0" tIns="0" rIns="0" bIns="0" rtlCol="0" anchor="ctr"/>
           <a:lstStyle/>
           <a:p>
-            <a:pPr algn="ctr" indent="0" marL="0">
+            <a:pPr marL="0" indent="0" algn="ctr">
               <a:lnSpc>
                 <a:spcPct val="120000"/>
               </a:lnSpc>
@@ -11222,7 +11271,7 @@
           <a:bodyPr wrap="square" lIns="0" tIns="0" rIns="0" bIns="0" rtlCol="0" anchor="ctr"/>
           <a:lstStyle/>
           <a:p>
-            <a:pPr algn="ctr" indent="0" marL="0">
+            <a:pPr marL="0" indent="0" algn="ctr">
               <a:buNone/>
             </a:pPr>
             <a:r>
@@ -11541,4 +11590,299 @@
     </a:ext>
   </a:extLst>
 </a:theme>
+</file>
+
+<file path=ppt/theme/theme2.xml><?xml version="1.0" encoding="utf-8"?>
+<a:theme xmlns:a="http://schemas.openxmlformats.org/drawingml/2006/main" name="Office Theme">
+  <a:themeElements>
+    <a:clrScheme name="Office">
+      <a:dk1>
+        <a:sysClr val="windowText" lastClr="000000"/>
+      </a:dk1>
+      <a:lt1>
+        <a:sysClr val="window" lastClr="FFFFFF"/>
+      </a:lt1>
+      <a:dk2>
+        <a:srgbClr val="44546A"/>
+      </a:dk2>
+      <a:lt2>
+        <a:srgbClr val="E7E6E6"/>
+      </a:lt2>
+      <a:accent1>
+        <a:srgbClr val="4472C4"/>
+      </a:accent1>
+      <a:accent2>
+        <a:srgbClr val="ED7D31"/>
+      </a:accent2>
+      <a:accent3>
+        <a:srgbClr val="A5A5A5"/>
+      </a:accent3>
+      <a:accent4>
+        <a:srgbClr val="FFC000"/>
+      </a:accent4>
+      <a:accent5>
+        <a:srgbClr val="5B9BD5"/>
+      </a:accent5>
+      <a:accent6>
+        <a:srgbClr val="70AD47"/>
+      </a:accent6>
+      <a:hlink>
+        <a:srgbClr val="0563C1"/>
+      </a:hlink>
+      <a:folHlink>
+        <a:srgbClr val="954F72"/>
+      </a:folHlink>
+    </a:clrScheme>
+    <a:fontScheme name="Office">
+      <a:majorFont>
+        <a:latin typeface="Calibri Light" panose="020F0302020204030204"/>
+        <a:ea typeface=""/>
+        <a:cs typeface=""/>
+        <a:font script="Jpan" typeface="游ゴシック Light"/>
+        <a:font script="Hang" typeface="맑은 고딕"/>
+        <a:font script="Hans" typeface="等线 Light"/>
+        <a:font script="Hant" typeface="新細明體"/>
+        <a:font script="Arab" typeface="Times New Roman"/>
+        <a:font script="Hebr" typeface="Times New Roman"/>
+        <a:font script="Thai" typeface="Angsana New"/>
+        <a:font script="Ethi" typeface="Nyala"/>
+        <a:font script="Beng" typeface="Vrinda"/>
+        <a:font script="Gujr" typeface="Shruti"/>
+        <a:font script="Khmr" typeface="MoolBoran"/>
+        <a:font script="Knda" typeface="Tunga"/>
+        <a:font script="Guru" typeface="Raavi"/>
+        <a:font script="Cans" typeface="Euphemia"/>
+        <a:font script="Cher" typeface="Plantagenet Cherokee"/>
+        <a:font script="Yiii" typeface="Microsoft Yi Baiti"/>
+        <a:font script="Tibt" typeface="Microsoft Himalaya"/>
+        <a:font script="Thaa" typeface="MV Boli"/>
+        <a:font script="Deva" typeface="Mangal"/>
+        <a:font script="Telu" typeface="Gautami"/>
+        <a:font script="Taml" typeface="Latha"/>
+        <a:font script="Syrc" typeface="Estrangelo Edessa"/>
+        <a:font script="Orya" typeface="Kalinga"/>
+        <a:font script="Mlym" typeface="Kartika"/>
+        <a:font script="Laoo" typeface="DokChampa"/>
+        <a:font script="Sinh" typeface="Iskoola Pota"/>
+        <a:font script="Mong" typeface="Mongolian Baiti"/>
+        <a:font script="Viet" typeface="Times New Roman"/>
+        <a:font script="Uigh" typeface="Microsoft Uighur"/>
+        <a:font script="Geor" typeface="Sylfaen"/>
+        <a:font script="Armn" typeface="Arial"/>
+        <a:font script="Bugi" typeface="Leelawadee UI"/>
+        <a:font script="Bopo" typeface="Microsoft JhengHei"/>
+        <a:font script="Java" typeface="Javanese Text"/>
+        <a:font script="Lisu" typeface="Segoe UI"/>
+        <a:font script="Mymr" typeface="Myanmar Text"/>
+        <a:font script="Nkoo" typeface="Ebrima"/>
+        <a:font script="Olck" typeface="Nirmala UI"/>
+        <a:font script="Osma" typeface="Ebrima"/>
+        <a:font script="Phag" typeface="Phagspa"/>
+        <a:font script="Syrn" typeface="Estrangelo Edessa"/>
+        <a:font script="Syrj" typeface="Estrangelo Edessa"/>
+        <a:font script="Syre" typeface="Estrangelo Edessa"/>
+        <a:font script="Sora" typeface="Nirmala UI"/>
+        <a:font script="Tale" typeface="Microsoft Tai Le"/>
+        <a:font script="Talu" typeface="Microsoft New Tai Lue"/>
+        <a:font script="Tfng" typeface="Ebrima"/>
+      </a:majorFont>
+      <a:minorFont>
+        <a:latin typeface="Calibri" panose="020F0502020204030204"/>
+        <a:ea typeface=""/>
+        <a:cs typeface=""/>
+        <a:font script="Jpan" typeface="游ゴシック"/>
+        <a:font script="Hang" typeface="맑은 고딕"/>
+        <a:font script="Hans" typeface="等线"/>
+        <a:font script="Hant" typeface="新細明體"/>
+        <a:font script="Arab" typeface="Arial"/>
+        <a:font script="Hebr" typeface="Arial"/>
+        <a:font script="Thai" typeface="Cordia New"/>
+        <a:font script="Ethi" typeface="Nyala"/>
+        <a:font script="Beng" typeface="Vrinda"/>
+        <a:font script="Gujr" typeface="Shruti"/>
+        <a:font script="Khmr" typeface="DaunPenh"/>
+        <a:font script="Knda" typeface="Tunga"/>
+        <a:font script="Guru" typeface="Raavi"/>
+        <a:font script="Cans" typeface="Euphemia"/>
+        <a:font script="Cher" typeface="Plantagenet Cherokee"/>
+        <a:font script="Yiii" typeface="Microsoft Yi Baiti"/>
+        <a:font script="Tibt" typeface="Microsoft Himalaya"/>
+        <a:font script="Thaa" typeface="MV Boli"/>
+        <a:font script="Deva" typeface="Mangal"/>
+        <a:font script="Telu" typeface="Gautami"/>
+        <a:font script="Taml" typeface="Latha"/>
+        <a:font script="Syrc" typeface="Estrangelo Edessa"/>
+        <a:font script="Orya" typeface="Kalinga"/>
+        <a:font script="Mlym" typeface="Kartika"/>
+        <a:font script="Laoo" typeface="DokChampa"/>
+        <a:font script="Sinh" typeface="Iskoola Pota"/>
+        <a:font script="Mong" typeface="Mongolian Baiti"/>
+        <a:font script="Viet" typeface="Arial"/>
+        <a:font script="Uigh" typeface="Microsoft Uighur"/>
+        <a:font script="Geor" typeface="Sylfaen"/>
+        <a:font script="Armn" typeface="Arial"/>
+        <a:font script="Bugi" typeface="Leelawadee UI"/>
+        <a:font script="Bopo" typeface="Microsoft JhengHei"/>
+        <a:font script="Java" typeface="Javanese Text"/>
+        <a:font script="Lisu" typeface="Segoe UI"/>
+        <a:font script="Mymr" typeface="Myanmar Text"/>
+        <a:font script="Nkoo" typeface="Ebrima"/>
+        <a:font script="Olck" typeface="Nirmala UI"/>
+        <a:font script="Osma" typeface="Ebrima"/>
+        <a:font script="Phag" typeface="Phagspa"/>
+        <a:font script="Syrn" typeface="Estrangelo Edessa"/>
+        <a:font script="Syrj" typeface="Estrangelo Edessa"/>
+        <a:font script="Syre" typeface="Estrangelo Edessa"/>
+        <a:font script="Sora" typeface="Nirmala UI"/>
+        <a:font script="Tale" typeface="Microsoft Tai Le"/>
+        <a:font script="Talu" typeface="Microsoft New Tai Lue"/>
+        <a:font script="Tfng" typeface="Ebrima"/>
+      </a:minorFont>
+    </a:fontScheme>
+    <a:fmtScheme name="Office">
+      <a:fillStyleLst>
+        <a:solidFill>
+          <a:schemeClr val="phClr"/>
+        </a:solidFill>
+        <a:gradFill rotWithShape="1">
+          <a:gsLst>
+            <a:gs pos="0">
+              <a:schemeClr val="phClr">
+                <a:lumMod val="110000"/>
+                <a:satMod val="105000"/>
+                <a:tint val="67000"/>
+              </a:schemeClr>
+            </a:gs>
+            <a:gs pos="50000">
+              <a:schemeClr val="phClr">
+                <a:lumMod val="105000"/>
+                <a:satMod val="103000"/>
+                <a:tint val="73000"/>
+              </a:schemeClr>
+            </a:gs>
+            <a:gs pos="100000">
+              <a:schemeClr val="phClr">
+                <a:lumMod val="105000"/>
+                <a:satMod val="109000"/>
+                <a:tint val="81000"/>
+              </a:schemeClr>
+            </a:gs>
+          </a:gsLst>
+          <a:lin ang="5400000" scaled="0"/>
+        </a:gradFill>
+        <a:gradFill rotWithShape="1">
+          <a:gsLst>
+            <a:gs pos="0">
+              <a:schemeClr val="phClr">
+                <a:satMod val="103000"/>
+                <a:lumMod val="102000"/>
+                <a:tint val="94000"/>
+              </a:schemeClr>
+            </a:gs>
+            <a:gs pos="50000">
+              <a:schemeClr val="phClr">
+                <a:satMod val="110000"/>
+                <a:lumMod val="100000"/>
+                <a:shade val="100000"/>
+              </a:schemeClr>
+            </a:gs>
+            <a:gs pos="100000">
+              <a:schemeClr val="phClr">
+                <a:lumMod val="99000"/>
+                <a:satMod val="120000"/>
+                <a:shade val="78000"/>
+              </a:schemeClr>
+            </a:gs>
+          </a:gsLst>
+          <a:lin ang="5400000" scaled="0"/>
+        </a:gradFill>
+      </a:fillStyleLst>
+      <a:lnStyleLst>
+        <a:ln w="6350" cap="flat" cmpd="sng" algn="ctr">
+          <a:solidFill>
+            <a:schemeClr val="phClr"/>
+          </a:solidFill>
+          <a:prstDash val="solid"/>
+          <a:miter lim="800000"/>
+        </a:ln>
+        <a:ln w="12700" cap="flat" cmpd="sng" algn="ctr">
+          <a:solidFill>
+            <a:schemeClr val="phClr"/>
+          </a:solidFill>
+          <a:prstDash val="solid"/>
+          <a:miter lim="800000"/>
+        </a:ln>
+        <a:ln w="19050" cap="flat" cmpd="sng" algn="ctr">
+          <a:solidFill>
+            <a:schemeClr val="phClr"/>
+          </a:solidFill>
+          <a:prstDash val="solid"/>
+          <a:miter lim="800000"/>
+        </a:ln>
+      </a:lnStyleLst>
+      <a:effectStyleLst>
+        <a:effectStyle>
+          <a:effectLst/>
+        </a:effectStyle>
+        <a:effectStyle>
+          <a:effectLst/>
+        </a:effectStyle>
+        <a:effectStyle>
+          <a:effectLst>
+            <a:outerShdw blurRad="57150" dist="19050" dir="5400000" algn="ctr" rotWithShape="0">
+              <a:srgbClr val="000000">
+                <a:alpha val="63000"/>
+              </a:srgbClr>
+            </a:outerShdw>
+          </a:effectLst>
+        </a:effectStyle>
+      </a:effectStyleLst>
+      <a:bgFillStyleLst>
+        <a:solidFill>
+          <a:schemeClr val="phClr"/>
+        </a:solidFill>
+        <a:solidFill>
+          <a:schemeClr val="phClr">
+            <a:tint val="95000"/>
+            <a:satMod val="170000"/>
+          </a:schemeClr>
+        </a:solidFill>
+        <a:gradFill rotWithShape="1">
+          <a:gsLst>
+            <a:gs pos="0">
+              <a:schemeClr val="phClr">
+                <a:tint val="93000"/>
+                <a:satMod val="150000"/>
+                <a:shade val="98000"/>
+                <a:lumMod val="102000"/>
+              </a:schemeClr>
+            </a:gs>
+            <a:gs pos="50000">
+              <a:schemeClr val="phClr">
+                <a:tint val="98000"/>
+                <a:satMod val="130000"/>
+                <a:shade val="90000"/>
+                <a:lumMod val="103000"/>
+              </a:schemeClr>
+            </a:gs>
+            <a:gs pos="100000">
+              <a:schemeClr val="phClr">
+                <a:shade val="63000"/>
+                <a:satMod val="120000"/>
+              </a:schemeClr>
+            </a:gs>
+          </a:gsLst>
+          <a:lin ang="5400000" scaled="0"/>
+        </a:gradFill>
+      </a:bgFillStyleLst>
+    </a:fmtScheme>
+  </a:themeElements>
+  <a:objectDefaults/>
+  <a:extraClrSchemeLst/>
+  <a:extLst>
+    <a:ext uri="{05A4C25C-085E-4340-85A3-A5531E510DB2}">
+      <thm15:themeFamily xmlns:thm15="http://schemas.microsoft.com/office/thememl/2012/main" name="Office Theme" id="{62F939B6-93AF-4DB8-9C6B-D6C7DFDC589F}" vid="{4A3C46E8-61CC-4603-A589-7422A47A8E4A}"/>
+    </a:ext>
+  </a:extLst>
+</a:theme>
 </file>